--- a/docs/qa/motor-ppt-2026-10-06/4-recetario/propuestas-rescatables.pptx
+++ b/docs/qa/motor-ppt-2026-10-06/4-recetario/propuestas-rescatables.pptx
@@ -29860,7 +29860,7 @@
                 <a:cs typeface="Arial"/>
                 <a:sym typeface="Arial"/>
               </a:rPr>
-              <a:t>La cifra y el detalle los calcula el motor; el rótulo corto se escribe en la app, como el texto de una lámina narrativa</a:t>
+              <a:t>La cifra y el detalle los calcula el motor. El rótulo corto se escribe en la app, como el texto de una lámina narrativa</a:t>
             </a:r>
           </a:p>
         </p:txBody>

--- a/docs/qa/motor-ppt-2026-10-06/4-recetario/propuestas-rescatables.pptx
+++ b/docs/qa/motor-ppt-2026-10-06/4-recetario/propuestas-rescatables.pptx
@@ -43526,7 +43526,7 @@
                 <a:cs typeface="Arial"/>
                 <a:sym typeface="Arial"/>
               </a:rPr>
-              <a:t>Schenker y Gentleman (2001); Cumming y Finch (2005); Gardner y Altman (1986); Newcombe (1998); Wright, Klein y Wieczorek (2019). Intervalos de Wilson y Newcombe</a:t>
+              <a:t>Fuentes: Schenker y Gentleman (2001), Cumming y Finch (2005), Gardner y Altman (1986), Newcombe (1998) y Wright, Klein y Wieczorek (2019). Intervalos de Wilson y Newcombe</a:t>
             </a:r>
           </a:p>
         </p:txBody>

--- a/docs/qa/motor-ppt-2026-10-06/4-recetario/propuestas-rescatables.pptx
+++ b/docs/qa/motor-ppt-2026-10-06/4-recetario/propuestas-rescatables.pptx
@@ -30,6 +30,8 @@
     <p:sldId id="272" r:id="rId24"/>
     <p:sldId id="273" r:id="rId25"/>
     <p:sldId id="274" r:id="rId26"/>
+    <p:sldId id="275" r:id="rId27"/>
+    <p:sldId id="276" r:id="rId28"/>
   </p:sldIdLst>
   <p:sldSz cx="12192000" cy="6858000"/>
   <p:notesSz cx="6858000" cy="9144000"/>
@@ -43698,7 +43700,7 @@
                 <a:cs typeface="Arial"/>
                 <a:sym typeface="Arial"/>
               </a:rPr>
-              <a:t>PROPUESTA 5: TABLA Y DIFERENCIA</a:t>
+              <a:t>PROPUESTA 5: VERSIÓN TÉCNICA</a:t>
             </a:r>
           </a:p>
         </p:txBody>
@@ -47257,7 +47259,7 @@
                 <a:cs typeface="Arial"/>
                 <a:sym typeface="Arial"/>
               </a:rPr>
-              <a:t>PROPUESTA 5: TABLA Y MATRIZ DE PARES</a:t>
+              <a:t>PROPUESTA 5: VERSIÓN TÉCNICA</a:t>
             </a:r>
           </a:p>
         </p:txBody>
@@ -51026,7 +51028,7 @@
                 <a:cs typeface="Arial"/>
                 <a:sym typeface="Arial"/>
               </a:rPr>
-              <a:t>PARA EVALUAR</a:t>
+              <a:t>PROPUESTA 5: VERSIÓN PARA PÚBLICO GENERAL</a:t>
             </a:r>
           </a:p>
         </p:txBody>
@@ -51077,7 +51079,7 @@
                 <a:cs typeface="Arial"/>
                 <a:sym typeface="Arial"/>
               </a:rPr>
-              <a:t>Lo que no se trae</a:t>
+              <a:t>Dónde docentes y estudiantes se diferencian de verdad</a:t>
             </a:r>
           </a:p>
         </p:txBody>
@@ -51093,10 +51095,829 @@
         </p:nvSpPr>
         <p:spPr>
           <a:xfrm>
-            <a:off x="452628" y="1508760"/>
-            <a:ext cx="502920" cy="502920"/>
-          </a:xfrm>
-          <a:prstGeom prst="ellipse">
+            <a:off x="5001260" y="1527048"/>
+            <a:ext cx="137160" cy="137160"/>
+          </a:xfrm>
+          <a:prstGeom prst="rect">
+            <a:avLst/>
+          </a:prstGeom>
+          <a:solidFill>
+            <a:srgbClr val="0B4F8C">
+              <a:alpha val="100000"/>
+            </a:srgbClr>
+          </a:solidFill>
+          <a:ln w="3175" cap="rnd" cmpd="sng">
+            <a:solidFill>
+              <a:srgbClr val="0B4F8C">
+                <a:alpha val="100000"/>
+              </a:srgbClr>
+            </a:solidFill>
+            <a:prstDash val="solid"/>
+            <a:round/>
+            <a:headEnd type="none" w="med" len="med"/>
+            <a:tailEnd type="none" w="med" len="med"/>
+          </a:ln>
+        </p:spPr>
+        <p:txBody>
+          <a:bodyPr/>
+          <a:lstStyle/>
+          <a:p>
+            <a:r>
+              <a:rPr/>
+              <a:t/>
+            </a:r>
+          </a:p>
+        </p:txBody>
+      </p:sp>
+      <p:sp>
+        <p:nvSpPr>
+          <p:cNvPr id="6" name=""/>
+          <p:cNvSpPr>
+            <a:spLocks noGrp="1"/>
+          </p:cNvSpPr>
+          <p:nvPr>
+            </p:nvPr>
+        </p:nvSpPr>
+        <p:spPr>
+          <a:xfrm>
+            <a:off x="5110988" y="1463040"/>
+            <a:ext cx="934720" cy="274320"/>
+          </a:xfrm>
+          <a:prstGeom prst="rect">
+            <a:avLst/>
+          </a:prstGeom>
+        </p:spPr>
+        <p:txBody>
+          <a:bodyPr/>
+          <a:lstStyle/>
+          <a:p>
+            <a:pPr algn="l" marL="0" marR="0">
+              <a:lnSpc>
+                <a:spcPct val="100000"/>
+              </a:lnSpc>
+              <a:spcBef>
+                <a:spcPts val="0"/>
+              </a:spcBef>
+              <a:spcAft>
+                <a:spcPts val="0"/>
+              </a:spcAft>
+              <a:buNone/>
+            </a:pPr>
+            <a:r>
+              <a:rPr cap="none" sz="1200" i="0" b="0" u="none" strike="noStrike">
+                <a:solidFill>
+                  <a:srgbClr val="081F5C">
+                    <a:alpha val="100000"/>
+                  </a:srgbClr>
+                </a:solidFill>
+                <a:latin typeface="Arial"/>
+                <a:ea typeface="Arial"/>
+                <a:cs typeface="Arial"/>
+                <a:sym typeface="Arial"/>
+              </a:rPr>
+              <a:t>Docentes</a:t>
+            </a:r>
+          </a:p>
+        </p:txBody>
+      </p:sp>
+      <p:sp>
+        <p:nvSpPr>
+          <p:cNvPr id="7" name=""/>
+          <p:cNvSpPr>
+            <a:spLocks noGrp="1"/>
+          </p:cNvSpPr>
+          <p:nvPr>
+            </p:nvPr>
+        </p:nvSpPr>
+        <p:spPr>
+          <a:xfrm>
+            <a:off x="6137148" y="1527048"/>
+            <a:ext cx="137160" cy="137160"/>
+          </a:xfrm>
+          <a:prstGeom prst="rect">
+            <a:avLst/>
+          </a:prstGeom>
+          <a:solidFill>
+            <a:srgbClr val="2A9D8F">
+              <a:alpha val="100000"/>
+            </a:srgbClr>
+          </a:solidFill>
+          <a:ln w="3175" cap="rnd" cmpd="sng">
+            <a:solidFill>
+              <a:srgbClr val="2A9D8F">
+                <a:alpha val="100000"/>
+              </a:srgbClr>
+            </a:solidFill>
+            <a:prstDash val="solid"/>
+            <a:round/>
+            <a:headEnd type="none" w="med" len="med"/>
+            <a:tailEnd type="none" w="med" len="med"/>
+          </a:ln>
+        </p:spPr>
+        <p:txBody>
+          <a:bodyPr/>
+          <a:lstStyle/>
+          <a:p>
+            <a:r>
+              <a:rPr/>
+              <a:t/>
+            </a:r>
+          </a:p>
+        </p:txBody>
+      </p:sp>
+      <p:sp>
+        <p:nvSpPr>
+          <p:cNvPr id="8" name=""/>
+          <p:cNvSpPr>
+            <a:spLocks noGrp="1"/>
+          </p:cNvSpPr>
+          <p:nvPr>
+            </p:nvPr>
+        </p:nvSpPr>
+        <p:spPr>
+          <a:xfrm>
+            <a:off x="6246876" y="1463040"/>
+            <a:ext cx="1087120" cy="274320"/>
+          </a:xfrm>
+          <a:prstGeom prst="rect">
+            <a:avLst/>
+          </a:prstGeom>
+        </p:spPr>
+        <p:txBody>
+          <a:bodyPr/>
+          <a:lstStyle/>
+          <a:p>
+            <a:pPr algn="l" marL="0" marR="0">
+              <a:lnSpc>
+                <a:spcPct val="100000"/>
+              </a:lnSpc>
+              <a:spcBef>
+                <a:spcPts val="0"/>
+              </a:spcBef>
+              <a:spcAft>
+                <a:spcPts val="0"/>
+              </a:spcAft>
+              <a:buNone/>
+            </a:pPr>
+            <a:r>
+              <a:rPr cap="none" sz="1200" i="0" b="0" u="none" strike="noStrike">
+                <a:solidFill>
+                  <a:srgbClr val="081F5C">
+                    <a:alpha val="100000"/>
+                  </a:srgbClr>
+                </a:solidFill>
+                <a:latin typeface="Arial"/>
+                <a:ea typeface="Arial"/>
+                <a:cs typeface="Arial"/>
+                <a:sym typeface="Arial"/>
+              </a:rPr>
+              <a:t>Estudiantes</a:t>
+            </a:r>
+          </a:p>
+        </p:txBody>
+      </p:sp>
+      <p:sp>
+        <p:nvSpPr>
+          <p:cNvPr id="9" name=""/>
+          <p:cNvSpPr>
+            <a:spLocks noGrp="1"/>
+          </p:cNvSpPr>
+          <p:nvPr>
+            </p:nvPr>
+        </p:nvSpPr>
+        <p:spPr>
+          <a:xfrm>
+            <a:off x="3558845" y="1965960"/>
+            <a:ext cx="5486" cy="3401568"/>
+          </a:xfrm>
+          <a:prstGeom prst="rect">
+            <a:avLst/>
+          </a:prstGeom>
+          <a:solidFill>
+            <a:srgbClr val="D5D9DF">
+              <a:alpha val="100000"/>
+            </a:srgbClr>
+          </a:solidFill>
+          <a:ln w="3175" cap="rnd" cmpd="sng">
+            <a:solidFill>
+              <a:srgbClr val="D5D9DF">
+                <a:alpha val="100000"/>
+              </a:srgbClr>
+            </a:solidFill>
+            <a:prstDash val="solid"/>
+            <a:round/>
+            <a:headEnd type="none" w="med" len="med"/>
+            <a:tailEnd type="none" w="med" len="med"/>
+          </a:ln>
+        </p:spPr>
+        <p:txBody>
+          <a:bodyPr/>
+          <a:lstStyle/>
+          <a:p>
+            <a:r>
+              <a:rPr/>
+              <a:t/>
+            </a:r>
+          </a:p>
+        </p:txBody>
+      </p:sp>
+      <p:sp>
+        <p:nvSpPr>
+          <p:cNvPr id="10" name=""/>
+          <p:cNvSpPr>
+            <a:spLocks noGrp="1"/>
+          </p:cNvSpPr>
+          <p:nvPr>
+            </p:nvPr>
+        </p:nvSpPr>
+        <p:spPr>
+          <a:xfrm>
+            <a:off x="3241548" y="5404104"/>
+            <a:ext cx="640080" cy="219456"/>
+          </a:xfrm>
+          <a:prstGeom prst="rect">
+            <a:avLst/>
+          </a:prstGeom>
+        </p:spPr>
+        <p:txBody>
+          <a:bodyPr/>
+          <a:lstStyle/>
+          <a:p>
+            <a:pPr algn="ctr" marL="0" marR="0">
+              <a:lnSpc>
+                <a:spcPct val="100000"/>
+              </a:lnSpc>
+              <a:spcBef>
+                <a:spcPts val="0"/>
+              </a:spcBef>
+              <a:spcAft>
+                <a:spcPts val="0"/>
+              </a:spcAft>
+              <a:buNone/>
+            </a:pPr>
+            <a:r>
+              <a:rPr cap="none" sz="1000" i="0" b="0" u="none" strike="noStrike">
+                <a:solidFill>
+                  <a:srgbClr val="5A6480">
+                    <a:alpha val="100000"/>
+                  </a:srgbClr>
+                </a:solidFill>
+                <a:latin typeface="Arial"/>
+                <a:ea typeface="Arial"/>
+                <a:cs typeface="Arial"/>
+                <a:sym typeface="Arial"/>
+              </a:rPr>
+              <a:t>50%</a:t>
+            </a:r>
+          </a:p>
+        </p:txBody>
+      </p:sp>
+      <p:sp>
+        <p:nvSpPr>
+          <p:cNvPr id="11" name=""/>
+          <p:cNvSpPr>
+            <a:spLocks noGrp="1"/>
+          </p:cNvSpPr>
+          <p:nvPr>
+            </p:nvPr>
+        </p:nvSpPr>
+        <p:spPr>
+          <a:xfrm>
+            <a:off x="4564685" y="1965960"/>
+            <a:ext cx="5486" cy="3401568"/>
+          </a:xfrm>
+          <a:prstGeom prst="rect">
+            <a:avLst/>
+          </a:prstGeom>
+          <a:solidFill>
+            <a:srgbClr val="D5D9DF">
+              <a:alpha val="100000"/>
+            </a:srgbClr>
+          </a:solidFill>
+          <a:ln w="3175" cap="rnd" cmpd="sng">
+            <a:solidFill>
+              <a:srgbClr val="D5D9DF">
+                <a:alpha val="100000"/>
+              </a:srgbClr>
+            </a:solidFill>
+            <a:prstDash val="solid"/>
+            <a:round/>
+            <a:headEnd type="none" w="med" len="med"/>
+            <a:tailEnd type="none" w="med" len="med"/>
+          </a:ln>
+        </p:spPr>
+        <p:txBody>
+          <a:bodyPr/>
+          <a:lstStyle/>
+          <a:p>
+            <a:r>
+              <a:rPr/>
+              <a:t/>
+            </a:r>
+          </a:p>
+        </p:txBody>
+      </p:sp>
+      <p:sp>
+        <p:nvSpPr>
+          <p:cNvPr id="12" name=""/>
+          <p:cNvSpPr>
+            <a:spLocks noGrp="1"/>
+          </p:cNvSpPr>
+          <p:nvPr>
+            </p:nvPr>
+        </p:nvSpPr>
+        <p:spPr>
+          <a:xfrm>
+            <a:off x="4247388" y="5404104"/>
+            <a:ext cx="640080" cy="219456"/>
+          </a:xfrm>
+          <a:prstGeom prst="rect">
+            <a:avLst/>
+          </a:prstGeom>
+        </p:spPr>
+        <p:txBody>
+          <a:bodyPr/>
+          <a:lstStyle/>
+          <a:p>
+            <a:pPr algn="ctr" marL="0" marR="0">
+              <a:lnSpc>
+                <a:spcPct val="100000"/>
+              </a:lnSpc>
+              <a:spcBef>
+                <a:spcPts val="0"/>
+              </a:spcBef>
+              <a:spcAft>
+                <a:spcPts val="0"/>
+              </a:spcAft>
+              <a:buNone/>
+            </a:pPr>
+            <a:r>
+              <a:rPr cap="none" sz="1000" i="0" b="0" u="none" strike="noStrike">
+                <a:solidFill>
+                  <a:srgbClr val="5A6480">
+                    <a:alpha val="100000"/>
+                  </a:srgbClr>
+                </a:solidFill>
+                <a:latin typeface="Arial"/>
+                <a:ea typeface="Arial"/>
+                <a:cs typeface="Arial"/>
+                <a:sym typeface="Arial"/>
+              </a:rPr>
+              <a:t>60%</a:t>
+            </a:r>
+          </a:p>
+        </p:txBody>
+      </p:sp>
+      <p:sp>
+        <p:nvSpPr>
+          <p:cNvPr id="13" name=""/>
+          <p:cNvSpPr>
+            <a:spLocks noGrp="1"/>
+          </p:cNvSpPr>
+          <p:nvPr>
+            </p:nvPr>
+        </p:nvSpPr>
+        <p:spPr>
+          <a:xfrm>
+            <a:off x="5570525" y="1965960"/>
+            <a:ext cx="5486" cy="3401568"/>
+          </a:xfrm>
+          <a:prstGeom prst="rect">
+            <a:avLst/>
+          </a:prstGeom>
+          <a:solidFill>
+            <a:srgbClr val="D5D9DF">
+              <a:alpha val="100000"/>
+            </a:srgbClr>
+          </a:solidFill>
+          <a:ln w="3175" cap="rnd" cmpd="sng">
+            <a:solidFill>
+              <a:srgbClr val="D5D9DF">
+                <a:alpha val="100000"/>
+              </a:srgbClr>
+            </a:solidFill>
+            <a:prstDash val="solid"/>
+            <a:round/>
+            <a:headEnd type="none" w="med" len="med"/>
+            <a:tailEnd type="none" w="med" len="med"/>
+          </a:ln>
+        </p:spPr>
+        <p:txBody>
+          <a:bodyPr/>
+          <a:lstStyle/>
+          <a:p>
+            <a:r>
+              <a:rPr/>
+              <a:t/>
+            </a:r>
+          </a:p>
+        </p:txBody>
+      </p:sp>
+      <p:sp>
+        <p:nvSpPr>
+          <p:cNvPr id="14" name=""/>
+          <p:cNvSpPr>
+            <a:spLocks noGrp="1"/>
+          </p:cNvSpPr>
+          <p:nvPr>
+            </p:nvPr>
+        </p:nvSpPr>
+        <p:spPr>
+          <a:xfrm>
+            <a:off x="5253228" y="5404104"/>
+            <a:ext cx="640080" cy="219456"/>
+          </a:xfrm>
+          <a:prstGeom prst="rect">
+            <a:avLst/>
+          </a:prstGeom>
+        </p:spPr>
+        <p:txBody>
+          <a:bodyPr/>
+          <a:lstStyle/>
+          <a:p>
+            <a:pPr algn="ctr" marL="0" marR="0">
+              <a:lnSpc>
+                <a:spcPct val="100000"/>
+              </a:lnSpc>
+              <a:spcBef>
+                <a:spcPts val="0"/>
+              </a:spcBef>
+              <a:spcAft>
+                <a:spcPts val="0"/>
+              </a:spcAft>
+              <a:buNone/>
+            </a:pPr>
+            <a:r>
+              <a:rPr cap="none" sz="1000" i="0" b="0" u="none" strike="noStrike">
+                <a:solidFill>
+                  <a:srgbClr val="5A6480">
+                    <a:alpha val="100000"/>
+                  </a:srgbClr>
+                </a:solidFill>
+                <a:latin typeface="Arial"/>
+                <a:ea typeface="Arial"/>
+                <a:cs typeface="Arial"/>
+                <a:sym typeface="Arial"/>
+              </a:rPr>
+              <a:t>70%</a:t>
+            </a:r>
+          </a:p>
+        </p:txBody>
+      </p:sp>
+      <p:sp>
+        <p:nvSpPr>
+          <p:cNvPr id="15" name=""/>
+          <p:cNvSpPr>
+            <a:spLocks noGrp="1"/>
+          </p:cNvSpPr>
+          <p:nvPr>
+            </p:nvPr>
+        </p:nvSpPr>
+        <p:spPr>
+          <a:xfrm>
+            <a:off x="6576365" y="1965960"/>
+            <a:ext cx="5486" cy="3401568"/>
+          </a:xfrm>
+          <a:prstGeom prst="rect">
+            <a:avLst/>
+          </a:prstGeom>
+          <a:solidFill>
+            <a:srgbClr val="D5D9DF">
+              <a:alpha val="100000"/>
+            </a:srgbClr>
+          </a:solidFill>
+          <a:ln w="3175" cap="rnd" cmpd="sng">
+            <a:solidFill>
+              <a:srgbClr val="D5D9DF">
+                <a:alpha val="100000"/>
+              </a:srgbClr>
+            </a:solidFill>
+            <a:prstDash val="solid"/>
+            <a:round/>
+            <a:headEnd type="none" w="med" len="med"/>
+            <a:tailEnd type="none" w="med" len="med"/>
+          </a:ln>
+        </p:spPr>
+        <p:txBody>
+          <a:bodyPr/>
+          <a:lstStyle/>
+          <a:p>
+            <a:r>
+              <a:rPr/>
+              <a:t/>
+            </a:r>
+          </a:p>
+        </p:txBody>
+      </p:sp>
+      <p:sp>
+        <p:nvSpPr>
+          <p:cNvPr id="16" name=""/>
+          <p:cNvSpPr>
+            <a:spLocks noGrp="1"/>
+          </p:cNvSpPr>
+          <p:nvPr>
+            </p:nvPr>
+        </p:nvSpPr>
+        <p:spPr>
+          <a:xfrm>
+            <a:off x="6259068" y="5404104"/>
+            <a:ext cx="640080" cy="219456"/>
+          </a:xfrm>
+          <a:prstGeom prst="rect">
+            <a:avLst/>
+          </a:prstGeom>
+        </p:spPr>
+        <p:txBody>
+          <a:bodyPr/>
+          <a:lstStyle/>
+          <a:p>
+            <a:pPr algn="ctr" marL="0" marR="0">
+              <a:lnSpc>
+                <a:spcPct val="100000"/>
+              </a:lnSpc>
+              <a:spcBef>
+                <a:spcPts val="0"/>
+              </a:spcBef>
+              <a:spcAft>
+                <a:spcPts val="0"/>
+              </a:spcAft>
+              <a:buNone/>
+            </a:pPr>
+            <a:r>
+              <a:rPr cap="none" sz="1000" i="0" b="0" u="none" strike="noStrike">
+                <a:solidFill>
+                  <a:srgbClr val="5A6480">
+                    <a:alpha val="100000"/>
+                  </a:srgbClr>
+                </a:solidFill>
+                <a:latin typeface="Arial"/>
+                <a:ea typeface="Arial"/>
+                <a:cs typeface="Arial"/>
+                <a:sym typeface="Arial"/>
+              </a:rPr>
+              <a:t>80%</a:t>
+            </a:r>
+          </a:p>
+        </p:txBody>
+      </p:sp>
+      <p:sp>
+        <p:nvSpPr>
+          <p:cNvPr id="17" name=""/>
+          <p:cNvSpPr>
+            <a:spLocks noGrp="1"/>
+          </p:cNvSpPr>
+          <p:nvPr>
+            </p:nvPr>
+        </p:nvSpPr>
+        <p:spPr>
+          <a:xfrm>
+            <a:off x="7582205" y="1965960"/>
+            <a:ext cx="5486" cy="3401568"/>
+          </a:xfrm>
+          <a:prstGeom prst="rect">
+            <a:avLst/>
+          </a:prstGeom>
+          <a:solidFill>
+            <a:srgbClr val="D5D9DF">
+              <a:alpha val="100000"/>
+            </a:srgbClr>
+          </a:solidFill>
+          <a:ln w="3175" cap="rnd" cmpd="sng">
+            <a:solidFill>
+              <a:srgbClr val="D5D9DF">
+                <a:alpha val="100000"/>
+              </a:srgbClr>
+            </a:solidFill>
+            <a:prstDash val="solid"/>
+            <a:round/>
+            <a:headEnd type="none" w="med" len="med"/>
+            <a:tailEnd type="none" w="med" len="med"/>
+          </a:ln>
+        </p:spPr>
+        <p:txBody>
+          <a:bodyPr/>
+          <a:lstStyle/>
+          <a:p>
+            <a:r>
+              <a:rPr/>
+              <a:t/>
+            </a:r>
+          </a:p>
+        </p:txBody>
+      </p:sp>
+      <p:sp>
+        <p:nvSpPr>
+          <p:cNvPr id="18" name=""/>
+          <p:cNvSpPr>
+            <a:spLocks noGrp="1"/>
+          </p:cNvSpPr>
+          <p:nvPr>
+            </p:nvPr>
+        </p:nvSpPr>
+        <p:spPr>
+          <a:xfrm>
+            <a:off x="7264908" y="5404104"/>
+            <a:ext cx="640080" cy="219456"/>
+          </a:xfrm>
+          <a:prstGeom prst="rect">
+            <a:avLst/>
+          </a:prstGeom>
+        </p:spPr>
+        <p:txBody>
+          <a:bodyPr/>
+          <a:lstStyle/>
+          <a:p>
+            <a:pPr algn="ctr" marL="0" marR="0">
+              <a:lnSpc>
+                <a:spcPct val="100000"/>
+              </a:lnSpc>
+              <a:spcBef>
+                <a:spcPts val="0"/>
+              </a:spcBef>
+              <a:spcAft>
+                <a:spcPts val="0"/>
+              </a:spcAft>
+              <a:buNone/>
+            </a:pPr>
+            <a:r>
+              <a:rPr cap="none" sz="1000" i="0" b="0" u="none" strike="noStrike">
+                <a:solidFill>
+                  <a:srgbClr val="5A6480">
+                    <a:alpha val="100000"/>
+                  </a:srgbClr>
+                </a:solidFill>
+                <a:latin typeface="Arial"/>
+                <a:ea typeface="Arial"/>
+                <a:cs typeface="Arial"/>
+                <a:sym typeface="Arial"/>
+              </a:rPr>
+              <a:t>90%</a:t>
+            </a:r>
+          </a:p>
+        </p:txBody>
+      </p:sp>
+      <p:sp>
+        <p:nvSpPr>
+          <p:cNvPr id="19" name=""/>
+          <p:cNvSpPr>
+            <a:spLocks noGrp="1"/>
+          </p:cNvSpPr>
+          <p:nvPr>
+            </p:nvPr>
+        </p:nvSpPr>
+        <p:spPr>
+          <a:xfrm>
+            <a:off x="8588045" y="1965960"/>
+            <a:ext cx="5486" cy="3401568"/>
+          </a:xfrm>
+          <a:prstGeom prst="rect">
+            <a:avLst/>
+          </a:prstGeom>
+          <a:solidFill>
+            <a:srgbClr val="D5D9DF">
+              <a:alpha val="100000"/>
+            </a:srgbClr>
+          </a:solidFill>
+          <a:ln w="3175" cap="rnd" cmpd="sng">
+            <a:solidFill>
+              <a:srgbClr val="D5D9DF">
+                <a:alpha val="100000"/>
+              </a:srgbClr>
+            </a:solidFill>
+            <a:prstDash val="solid"/>
+            <a:round/>
+            <a:headEnd type="none" w="med" len="med"/>
+            <a:tailEnd type="none" w="med" len="med"/>
+          </a:ln>
+        </p:spPr>
+        <p:txBody>
+          <a:bodyPr/>
+          <a:lstStyle/>
+          <a:p>
+            <a:r>
+              <a:rPr/>
+              <a:t/>
+            </a:r>
+          </a:p>
+        </p:txBody>
+      </p:sp>
+      <p:sp>
+        <p:nvSpPr>
+          <p:cNvPr id="20" name=""/>
+          <p:cNvSpPr>
+            <a:spLocks noGrp="1"/>
+          </p:cNvSpPr>
+          <p:nvPr>
+            </p:nvPr>
+        </p:nvSpPr>
+        <p:spPr>
+          <a:xfrm>
+            <a:off x="8270748" y="5404104"/>
+            <a:ext cx="640080" cy="219456"/>
+          </a:xfrm>
+          <a:prstGeom prst="rect">
+            <a:avLst/>
+          </a:prstGeom>
+        </p:spPr>
+        <p:txBody>
+          <a:bodyPr/>
+          <a:lstStyle/>
+          <a:p>
+            <a:pPr algn="ctr" marL="0" marR="0">
+              <a:lnSpc>
+                <a:spcPct val="100000"/>
+              </a:lnSpc>
+              <a:spcBef>
+                <a:spcPts val="0"/>
+              </a:spcBef>
+              <a:spcAft>
+                <a:spcPts val="0"/>
+              </a:spcAft>
+              <a:buNone/>
+            </a:pPr>
+            <a:r>
+              <a:rPr cap="none" sz="1000" i="0" b="0" u="none" strike="noStrike">
+                <a:solidFill>
+                  <a:srgbClr val="5A6480">
+                    <a:alpha val="100000"/>
+                  </a:srgbClr>
+                </a:solidFill>
+                <a:latin typeface="Arial"/>
+                <a:ea typeface="Arial"/>
+                <a:cs typeface="Arial"/>
+                <a:sym typeface="Arial"/>
+              </a:rPr>
+              <a:t>100%</a:t>
+            </a:r>
+          </a:p>
+        </p:txBody>
+      </p:sp>
+      <p:sp>
+        <p:nvSpPr>
+          <p:cNvPr id="21" name=""/>
+          <p:cNvSpPr>
+            <a:spLocks noGrp="1"/>
+          </p:cNvSpPr>
+          <p:nvPr>
+            </p:nvPr>
+        </p:nvSpPr>
+        <p:spPr>
+          <a:xfrm>
+            <a:off x="361188" y="2103120"/>
+            <a:ext cx="3017520" cy="292608"/>
+          </a:xfrm>
+          <a:prstGeom prst="rect">
+            <a:avLst/>
+          </a:prstGeom>
+        </p:spPr>
+        <p:txBody>
+          <a:bodyPr/>
+          <a:lstStyle/>
+          <a:p>
+            <a:pPr algn="l" marL="0" marR="0">
+              <a:lnSpc>
+                <a:spcPct val="100000"/>
+              </a:lnSpc>
+              <a:spcBef>
+                <a:spcPts val="0"/>
+              </a:spcBef>
+              <a:spcAft>
+                <a:spcPts val="0"/>
+              </a:spcAft>
+              <a:buNone/>
+            </a:pPr>
+            <a:r>
+              <a:rPr cap="none" sz="1400" i="0" b="1" u="none" strike="noStrike">
+                <a:solidFill>
+                  <a:srgbClr val="081F5C">
+                    <a:alpha val="100000"/>
+                  </a:srgbClr>
+                </a:solidFill>
+                <a:latin typeface="Arial"/>
+                <a:ea typeface="Arial"/>
+                <a:cs typeface="Arial"/>
+                <a:sym typeface="Arial"/>
+              </a:rPr>
+              <a:t>Conoce la misión</a:t>
+            </a:r>
+          </a:p>
+        </p:txBody>
+      </p:sp>
+      <p:sp>
+        <p:nvSpPr>
+          <p:cNvPr id="22" name=""/>
+          <p:cNvSpPr>
+            <a:spLocks noGrp="1"/>
+          </p:cNvSpPr>
+          <p:nvPr>
+            </p:nvPr>
+        </p:nvSpPr>
+        <p:spPr>
+          <a:xfrm>
+            <a:off x="6277356" y="2212848"/>
+            <a:ext cx="2112264" cy="73152"/>
+          </a:xfrm>
+          <a:prstGeom prst="rect">
             <a:avLst/>
           </a:prstGeom>
           <a:solidFill>
@@ -51127,44 +51948,64 @@
           </a:p>
         </p:txBody>
       </p:sp>
-      <p:pic>
-        <p:nvPicPr>
-          <p:cNvPr id="6" name="" descr=""/>
-          <p:cNvPicPr>
-            <a:picLocks noGrp="1"/>
-          </p:cNvPicPr>
-          <p:nvPr>
-            </p:nvPr>
-        </p:nvPicPr>
-        <p:blipFill>
-          <a:blip r:embed="rId2"/>
-          <a:stretch>
-            <a:fillRect/>
-          </a:stretch>
-        </p:blipFill>
-        <p:spPr>
-          <a:xfrm>
-            <a:off x="573329" y="1629461"/>
-            <a:ext cx="261518" cy="261518"/>
-          </a:xfrm>
-          <a:prstGeom prst="rect">
-            <a:avLst/>
-          </a:prstGeom>
-        </p:spPr>
-      </p:pic>
-      <p:sp>
-        <p:nvSpPr>
-          <p:cNvPr id="7" name=""/>
-          <p:cNvSpPr>
-            <a:spLocks noGrp="1"/>
-          </p:cNvSpPr>
-          <p:nvPr>
-            </p:nvPr>
-        </p:nvSpPr>
-        <p:spPr>
-          <a:xfrm>
-            <a:off x="1138428" y="1490472"/>
-            <a:ext cx="10765231" cy="292608"/>
+      <p:sp>
+        <p:nvSpPr>
+          <p:cNvPr id="23" name=""/>
+          <p:cNvSpPr>
+            <a:spLocks noGrp="1"/>
+          </p:cNvSpPr>
+          <p:nvPr>
+            </p:nvPr>
+        </p:nvSpPr>
+        <p:spPr>
+          <a:xfrm>
+            <a:off x="8279892" y="2139696"/>
+            <a:ext cx="219456" cy="219456"/>
+          </a:xfrm>
+          <a:prstGeom prst="ellipse">
+            <a:avLst/>
+          </a:prstGeom>
+          <a:solidFill>
+            <a:srgbClr val="0B4F8C">
+              <a:alpha val="100000"/>
+            </a:srgbClr>
+          </a:solidFill>
+          <a:ln w="12700" cap="rnd" cmpd="sng">
+            <a:solidFill>
+              <a:srgbClr val="FFFFFF">
+                <a:alpha val="100000"/>
+              </a:srgbClr>
+            </a:solidFill>
+            <a:prstDash val="solid"/>
+            <a:round/>
+            <a:headEnd type="none" w="med" len="med"/>
+            <a:tailEnd type="none" w="med" len="med"/>
+          </a:ln>
+        </p:spPr>
+        <p:txBody>
+          <a:bodyPr/>
+          <a:lstStyle/>
+          <a:p>
+            <a:r>
+              <a:rPr/>
+              <a:t/>
+            </a:r>
+          </a:p>
+        </p:txBody>
+      </p:sp>
+      <p:sp>
+        <p:nvSpPr>
+          <p:cNvPr id="24" name=""/>
+          <p:cNvSpPr>
+            <a:spLocks noGrp="1"/>
+          </p:cNvSpPr>
+          <p:nvPr>
+            </p:nvPr>
+        </p:nvSpPr>
+        <p:spPr>
+          <a:xfrm>
+            <a:off x="8499348" y="2112264"/>
+            <a:ext cx="640080" cy="274320"/>
           </a:xfrm>
           <a:prstGeom prst="rect">
             <a:avLst/>
@@ -51187,7 +52028,7 @@
               <a:buNone/>
             </a:pPr>
             <a:r>
-              <a:rPr cap="none" sz="1400" i="0" b="1" u="none" strike="noStrike">
+              <a:rPr cap="none" sz="1200" i="0" b="1" u="none" strike="noStrike">
                 <a:solidFill>
                   <a:srgbClr val="081F5C">
                     <a:alpha val="100000"/>
@@ -51198,34 +52039,79 @@
                 <a:cs typeface="Arial"/>
                 <a:sym typeface="Arial"/>
               </a:rPr>
-              <a:t>Fondo oscuro a sangre y cuña diagonal</a:t>
-            </a:r>
-          </a:p>
-        </p:txBody>
-      </p:sp>
-      <p:sp>
-        <p:nvSpPr>
-          <p:cNvPr id="8" name=""/>
-          <p:cNvSpPr>
-            <a:spLocks noGrp="1"/>
-          </p:cNvSpPr>
-          <p:nvPr>
-            </p:nvPr>
-        </p:nvSpPr>
-        <p:spPr>
-          <a:xfrm>
-            <a:off x="1138428" y="1783080"/>
-            <a:ext cx="10765231" cy="457200"/>
-          </a:xfrm>
-          <a:prstGeom prst="rect">
-            <a:avLst/>
-          </a:prstGeom>
-        </p:spPr>
-        <p:txBody>
-          <a:bodyPr/>
-          <a:lstStyle/>
-          <a:p>
-            <a:pPr algn="l" marL="0" marR="0">
+              <a:t>98%</a:t>
+            </a:r>
+          </a:p>
+        </p:txBody>
+      </p:sp>
+      <p:sp>
+        <p:nvSpPr>
+          <p:cNvPr id="25" name=""/>
+          <p:cNvSpPr>
+            <a:spLocks noGrp="1"/>
+          </p:cNvSpPr>
+          <p:nvPr>
+            </p:nvPr>
+        </p:nvSpPr>
+        <p:spPr>
+          <a:xfrm>
+            <a:off x="6167628" y="2139696"/>
+            <a:ext cx="219456" cy="219456"/>
+          </a:xfrm>
+          <a:prstGeom prst="ellipse">
+            <a:avLst/>
+          </a:prstGeom>
+          <a:solidFill>
+            <a:srgbClr val="2A9D8F">
+              <a:alpha val="100000"/>
+            </a:srgbClr>
+          </a:solidFill>
+          <a:ln w="12700" cap="rnd" cmpd="sng">
+            <a:solidFill>
+              <a:srgbClr val="FFFFFF">
+                <a:alpha val="100000"/>
+              </a:srgbClr>
+            </a:solidFill>
+            <a:prstDash val="solid"/>
+            <a:round/>
+            <a:headEnd type="none" w="med" len="med"/>
+            <a:tailEnd type="none" w="med" len="med"/>
+          </a:ln>
+        </p:spPr>
+        <p:txBody>
+          <a:bodyPr/>
+          <a:lstStyle/>
+          <a:p>
+            <a:r>
+              <a:rPr/>
+              <a:t/>
+            </a:r>
+          </a:p>
+        </p:txBody>
+      </p:sp>
+      <p:sp>
+        <p:nvSpPr>
+          <p:cNvPr id="26" name=""/>
+          <p:cNvSpPr>
+            <a:spLocks noGrp="1"/>
+          </p:cNvSpPr>
+          <p:nvPr>
+            </p:nvPr>
+        </p:nvSpPr>
+        <p:spPr>
+          <a:xfrm>
+            <a:off x="5527548" y="2112264"/>
+            <a:ext cx="640080" cy="274320"/>
+          </a:xfrm>
+          <a:prstGeom prst="rect">
+            <a:avLst/>
+          </a:prstGeom>
+        </p:spPr>
+        <p:txBody>
+          <a:bodyPr/>
+          <a:lstStyle/>
+          <a:p>
+            <a:pPr algn="r" marL="0" marR="0">
               <a:lnSpc>
                 <a:spcPct val="100000"/>
               </a:lnSpc>
@@ -51238,9 +52124,9 @@
               <a:buNone/>
             </a:pPr>
             <a:r>
-              <a:rPr cap="none" sz="1250" i="0" b="0" u="none" strike="noStrike">
-                <a:solidFill>
-                  <a:srgbClr val="5A6480">
+              <a:rPr cap="none" sz="1200" i="0" b="1" u="none" strike="noStrike">
+                <a:solidFill>
+                  <a:srgbClr val="081F5C">
                     <a:alpha val="100000"/>
                   </a:srgbClr>
                 </a:solidFill>
@@ -51249,23 +52135,74 @@
                 <a:cs typeface="Arial"/>
                 <a:sym typeface="Arial"/>
               </a:rPr>
-              <a:t>Son la firma visual del informe de referencia. PULSO ya tiene la suya: fondo claro, personas y público.</a:t>
-            </a:r>
-          </a:p>
-        </p:txBody>
-      </p:sp>
-      <p:sp>
-        <p:nvSpPr>
-          <p:cNvPr id="9" name=""/>
-          <p:cNvSpPr>
-            <a:spLocks noGrp="1"/>
-          </p:cNvSpPr>
-          <p:nvPr>
-            </p:nvPr>
-        </p:nvSpPr>
-        <p:spPr>
-          <a:xfrm>
-            <a:off x="452628" y="2331720"/>
+              <a:t>77%</a:t>
+            </a:r>
+          </a:p>
+        </p:txBody>
+      </p:sp>
+      <p:sp>
+        <p:nvSpPr>
+          <p:cNvPr id="27" name=""/>
+          <p:cNvSpPr>
+            <a:spLocks noGrp="1"/>
+          </p:cNvSpPr>
+          <p:nvPr>
+            </p:nvPr>
+        </p:nvSpPr>
+        <p:spPr>
+          <a:xfrm>
+            <a:off x="9368028" y="2112264"/>
+            <a:ext cx="2535631" cy="274320"/>
+          </a:xfrm>
+          <a:prstGeom prst="rect">
+            <a:avLst/>
+          </a:prstGeom>
+        </p:spPr>
+        <p:txBody>
+          <a:bodyPr/>
+          <a:lstStyle/>
+          <a:p>
+            <a:pPr algn="l" marL="0" marR="0">
+              <a:lnSpc>
+                <a:spcPct val="100000"/>
+              </a:lnSpc>
+              <a:spcBef>
+                <a:spcPts val="0"/>
+              </a:spcBef>
+              <a:spcAft>
+                <a:spcPts val="0"/>
+              </a:spcAft>
+              <a:buNone/>
+            </a:pPr>
+            <a:r>
+              <a:rPr cap="none" sz="1300" i="0" b="1" u="none" strike="noStrike">
+                <a:solidFill>
+                  <a:srgbClr val="081F5C">
+                    <a:alpha val="100000"/>
+                  </a:srgbClr>
+                </a:solidFill>
+                <a:latin typeface="Arial"/>
+                <a:ea typeface="Arial"/>
+                <a:cs typeface="Arial"/>
+                <a:sym typeface="Arial"/>
+              </a:rPr>
+              <a:t>Diferencia clara</a:t>
+            </a:r>
+          </a:p>
+        </p:txBody>
+      </p:sp>
+      <p:sp>
+        <p:nvSpPr>
+          <p:cNvPr id="28" name=""/>
+          <p:cNvSpPr>
+            <a:spLocks noGrp="1"/>
+          </p:cNvSpPr>
+          <p:nvPr>
+            </p:nvPr>
+        </p:nvSpPr>
+        <p:spPr>
+          <a:xfrm>
+            <a:off x="452628" y="2532888"/>
             <a:ext cx="11451031" cy="7315"/>
           </a:xfrm>
           <a:prstGeom prst="rect">
@@ -51301,19 +52238,70 @@
       </p:sp>
       <p:sp>
         <p:nvSpPr>
-          <p:cNvPr id="10" name=""/>
-          <p:cNvSpPr>
-            <a:spLocks noGrp="1"/>
-          </p:cNvSpPr>
-          <p:nvPr>
-            </p:nvPr>
-        </p:nvSpPr>
-        <p:spPr>
-          <a:xfrm>
-            <a:off x="452628" y="2468880"/>
-            <a:ext cx="502920" cy="502920"/>
-          </a:xfrm>
-          <a:prstGeom prst="ellipse">
+          <p:cNvPr id="29" name=""/>
+          <p:cNvSpPr>
+            <a:spLocks noGrp="1"/>
+          </p:cNvSpPr>
+          <p:nvPr>
+            </p:nvPr>
+        </p:nvSpPr>
+        <p:spPr>
+          <a:xfrm>
+            <a:off x="361188" y="2670048"/>
+            <a:ext cx="3017520" cy="292608"/>
+          </a:xfrm>
+          <a:prstGeom prst="rect">
+            <a:avLst/>
+          </a:prstGeom>
+        </p:spPr>
+        <p:txBody>
+          <a:bodyPr/>
+          <a:lstStyle/>
+          <a:p>
+            <a:pPr algn="l" marL="0" marR="0">
+              <a:lnSpc>
+                <a:spcPct val="100000"/>
+              </a:lnSpc>
+              <a:spcBef>
+                <a:spcPts val="0"/>
+              </a:spcBef>
+              <a:spcAft>
+                <a:spcPts val="0"/>
+              </a:spcAft>
+              <a:buNone/>
+            </a:pPr>
+            <a:r>
+              <a:rPr cap="none" sz="1400" i="0" b="1" u="none" strike="noStrike">
+                <a:solidFill>
+                  <a:srgbClr val="081F5C">
+                    <a:alpha val="100000"/>
+                  </a:srgbClr>
+                </a:solidFill>
+                <a:latin typeface="Arial"/>
+                <a:ea typeface="Arial"/>
+                <a:cs typeface="Arial"/>
+                <a:sym typeface="Arial"/>
+              </a:rPr>
+              <a:t>Sabe dónde consultarla</a:t>
+            </a:r>
+          </a:p>
+        </p:txBody>
+      </p:sp>
+      <p:sp>
+        <p:nvSpPr>
+          <p:cNvPr id="30" name=""/>
+          <p:cNvSpPr>
+            <a:spLocks noGrp="1"/>
+          </p:cNvSpPr>
+          <p:nvPr>
+            </p:nvPr>
+        </p:nvSpPr>
+        <p:spPr>
+          <a:xfrm>
+            <a:off x="6579108" y="2779776"/>
+            <a:ext cx="1207008" cy="73152"/>
+          </a:xfrm>
+          <a:prstGeom prst="rect">
             <a:avLst/>
           </a:prstGeom>
           <a:solidFill>
@@ -51344,44 +52332,64 @@
           </a:p>
         </p:txBody>
       </p:sp>
-      <p:pic>
-        <p:nvPicPr>
-          <p:cNvPr id="11" name="" descr=""/>
-          <p:cNvPicPr>
-            <a:picLocks noGrp="1"/>
-          </p:cNvPicPr>
-          <p:nvPr>
-            </p:nvPr>
-        </p:nvPicPr>
-        <p:blipFill>
-          <a:blip r:embed="rId3"/>
-          <a:stretch>
-            <a:fillRect/>
-          </a:stretch>
-        </p:blipFill>
-        <p:spPr>
-          <a:xfrm>
-            <a:off x="573329" y="2589581"/>
-            <a:ext cx="261518" cy="261518"/>
-          </a:xfrm>
-          <a:prstGeom prst="rect">
-            <a:avLst/>
-          </a:prstGeom>
-        </p:spPr>
-      </p:pic>
-      <p:sp>
-        <p:nvSpPr>
-          <p:cNvPr id="12" name=""/>
-          <p:cNvSpPr>
-            <a:spLocks noGrp="1"/>
-          </p:cNvSpPr>
-          <p:nvPr>
-            </p:nvPr>
-        </p:nvSpPr>
-        <p:spPr>
-          <a:xfrm>
-            <a:off x="1138428" y="2450592"/>
-            <a:ext cx="10765231" cy="292608"/>
+      <p:sp>
+        <p:nvSpPr>
+          <p:cNvPr id="31" name=""/>
+          <p:cNvSpPr>
+            <a:spLocks noGrp="1"/>
+          </p:cNvSpPr>
+          <p:nvPr>
+            </p:nvPr>
+        </p:nvSpPr>
+        <p:spPr>
+          <a:xfrm>
+            <a:off x="7676388" y="2706624"/>
+            <a:ext cx="219456" cy="219456"/>
+          </a:xfrm>
+          <a:prstGeom prst="ellipse">
+            <a:avLst/>
+          </a:prstGeom>
+          <a:solidFill>
+            <a:srgbClr val="0B4F8C">
+              <a:alpha val="100000"/>
+            </a:srgbClr>
+          </a:solidFill>
+          <a:ln w="12700" cap="rnd" cmpd="sng">
+            <a:solidFill>
+              <a:srgbClr val="FFFFFF">
+                <a:alpha val="100000"/>
+              </a:srgbClr>
+            </a:solidFill>
+            <a:prstDash val="solid"/>
+            <a:round/>
+            <a:headEnd type="none" w="med" len="med"/>
+            <a:tailEnd type="none" w="med" len="med"/>
+          </a:ln>
+        </p:spPr>
+        <p:txBody>
+          <a:bodyPr/>
+          <a:lstStyle/>
+          <a:p>
+            <a:r>
+              <a:rPr/>
+              <a:t/>
+            </a:r>
+          </a:p>
+        </p:txBody>
+      </p:sp>
+      <p:sp>
+        <p:nvSpPr>
+          <p:cNvPr id="32" name=""/>
+          <p:cNvSpPr>
+            <a:spLocks noGrp="1"/>
+          </p:cNvSpPr>
+          <p:nvPr>
+            </p:nvPr>
+        </p:nvSpPr>
+        <p:spPr>
+          <a:xfrm>
+            <a:off x="7895844" y="2679192"/>
+            <a:ext cx="640080" cy="274320"/>
           </a:xfrm>
           <a:prstGeom prst="rect">
             <a:avLst/>
@@ -51404,7 +52412,7 @@
               <a:buNone/>
             </a:pPr>
             <a:r>
-              <a:rPr cap="none" sz="1400" i="0" b="1" u="none" strike="noStrike">
+              <a:rPr cap="none" sz="1200" i="0" b="1" u="none" strike="noStrike">
                 <a:solidFill>
                   <a:srgbClr val="081F5C">
                     <a:alpha val="100000"/>
@@ -51415,34 +52423,79 @@
                 <a:cs typeface="Arial"/>
                 <a:sym typeface="Arial"/>
               </a:rPr>
-              <a:t>Láminas de bloques de texto</a:t>
-            </a:r>
-          </a:p>
-        </p:txBody>
-      </p:sp>
-      <p:sp>
-        <p:nvSpPr>
-          <p:cNvPr id="13" name=""/>
-          <p:cNvSpPr>
-            <a:spLocks noGrp="1"/>
-          </p:cNvSpPr>
-          <p:nvPr>
-            </p:nvPr>
-        </p:nvSpPr>
-        <p:spPr>
-          <a:xfrm>
-            <a:off x="1138428" y="2743200"/>
-            <a:ext cx="10765231" cy="457200"/>
-          </a:xfrm>
-          <a:prstGeom prst="rect">
-            <a:avLst/>
-          </a:prstGeom>
-        </p:spPr>
-        <p:txBody>
-          <a:bodyPr/>
-          <a:lstStyle/>
-          <a:p>
-            <a:pPr algn="l" marL="0" marR="0">
+              <a:t>92%</a:t>
+            </a:r>
+          </a:p>
+        </p:txBody>
+      </p:sp>
+      <p:sp>
+        <p:nvSpPr>
+          <p:cNvPr id="33" name=""/>
+          <p:cNvSpPr>
+            <a:spLocks noGrp="1"/>
+          </p:cNvSpPr>
+          <p:nvPr>
+            </p:nvPr>
+        </p:nvSpPr>
+        <p:spPr>
+          <a:xfrm>
+            <a:off x="6469380" y="2706624"/>
+            <a:ext cx="219456" cy="219456"/>
+          </a:xfrm>
+          <a:prstGeom prst="ellipse">
+            <a:avLst/>
+          </a:prstGeom>
+          <a:solidFill>
+            <a:srgbClr val="2A9D8F">
+              <a:alpha val="100000"/>
+            </a:srgbClr>
+          </a:solidFill>
+          <a:ln w="12700" cap="rnd" cmpd="sng">
+            <a:solidFill>
+              <a:srgbClr val="FFFFFF">
+                <a:alpha val="100000"/>
+              </a:srgbClr>
+            </a:solidFill>
+            <a:prstDash val="solid"/>
+            <a:round/>
+            <a:headEnd type="none" w="med" len="med"/>
+            <a:tailEnd type="none" w="med" len="med"/>
+          </a:ln>
+        </p:spPr>
+        <p:txBody>
+          <a:bodyPr/>
+          <a:lstStyle/>
+          <a:p>
+            <a:r>
+              <a:rPr/>
+              <a:t/>
+            </a:r>
+          </a:p>
+        </p:txBody>
+      </p:sp>
+      <p:sp>
+        <p:nvSpPr>
+          <p:cNvPr id="34" name=""/>
+          <p:cNvSpPr>
+            <a:spLocks noGrp="1"/>
+          </p:cNvSpPr>
+          <p:nvPr>
+            </p:nvPr>
+        </p:nvSpPr>
+        <p:spPr>
+          <a:xfrm>
+            <a:off x="5829300" y="2679192"/>
+            <a:ext cx="640080" cy="274320"/>
+          </a:xfrm>
+          <a:prstGeom prst="rect">
+            <a:avLst/>
+          </a:prstGeom>
+        </p:spPr>
+        <p:txBody>
+          <a:bodyPr/>
+          <a:lstStyle/>
+          <a:p>
+            <a:pPr algn="r" marL="0" marR="0">
               <a:lnSpc>
                 <a:spcPct val="100000"/>
               </a:lnSpc>
@@ -51455,9 +52508,9 @@
               <a:buNone/>
             </a:pPr>
             <a:r>
-              <a:rPr cap="none" sz="1250" i="0" b="0" u="none" strike="noStrike">
-                <a:solidFill>
-                  <a:srgbClr val="5A6480">
+              <a:rPr cap="none" sz="1200" i="0" b="1" u="none" strike="noStrike">
+                <a:solidFill>
+                  <a:srgbClr val="081F5C">
                     <a:alpha val="100000"/>
                   </a:srgbClr>
                 </a:solidFill>
@@ -51466,23 +52519,74 @@
                 <a:cs typeface="Arial"/>
                 <a:sym typeface="Arial"/>
               </a:rPr>
-              <a:t>Limitaciones o recomendaciones en párrafos no salen de los datos. Si hacen falta, van en la ficha técnica o en el Word.</a:t>
-            </a:r>
-          </a:p>
-        </p:txBody>
-      </p:sp>
-      <p:sp>
-        <p:nvSpPr>
-          <p:cNvPr id="14" name=""/>
-          <p:cNvSpPr>
-            <a:spLocks noGrp="1"/>
-          </p:cNvSpPr>
-          <p:nvPr>
-            </p:nvPr>
-        </p:nvSpPr>
-        <p:spPr>
-          <a:xfrm>
-            <a:off x="452628" y="3291840"/>
+              <a:t>80%</a:t>
+            </a:r>
+          </a:p>
+        </p:txBody>
+      </p:sp>
+      <p:sp>
+        <p:nvSpPr>
+          <p:cNvPr id="35" name=""/>
+          <p:cNvSpPr>
+            <a:spLocks noGrp="1"/>
+          </p:cNvSpPr>
+          <p:nvPr>
+            </p:nvPr>
+        </p:nvSpPr>
+        <p:spPr>
+          <a:xfrm>
+            <a:off x="9368028" y="2679192"/>
+            <a:ext cx="2535631" cy="274320"/>
+          </a:xfrm>
+          <a:prstGeom prst="rect">
+            <a:avLst/>
+          </a:prstGeom>
+        </p:spPr>
+        <p:txBody>
+          <a:bodyPr/>
+          <a:lstStyle/>
+          <a:p>
+            <a:pPr algn="l" marL="0" marR="0">
+              <a:lnSpc>
+                <a:spcPct val="100000"/>
+              </a:lnSpc>
+              <a:spcBef>
+                <a:spcPts val="0"/>
+              </a:spcBef>
+              <a:spcAft>
+                <a:spcPts val="0"/>
+              </a:spcAft>
+              <a:buNone/>
+            </a:pPr>
+            <a:r>
+              <a:rPr cap="none" sz="1300" i="0" b="1" u="none" strike="noStrike">
+                <a:solidFill>
+                  <a:srgbClr val="081F5C">
+                    <a:alpha val="100000"/>
+                  </a:srgbClr>
+                </a:solidFill>
+                <a:latin typeface="Arial"/>
+                <a:ea typeface="Arial"/>
+                <a:cs typeface="Arial"/>
+                <a:sym typeface="Arial"/>
+              </a:rPr>
+              <a:t>Diferencia clara</a:t>
+            </a:r>
+          </a:p>
+        </p:txBody>
+      </p:sp>
+      <p:sp>
+        <p:nvSpPr>
+          <p:cNvPr id="36" name=""/>
+          <p:cNvSpPr>
+            <a:spLocks noGrp="1"/>
+          </p:cNvSpPr>
+          <p:nvPr>
+            </p:nvPr>
+        </p:nvSpPr>
+        <p:spPr>
+          <a:xfrm>
+            <a:off x="452628" y="3099816"/>
             <a:ext cx="11451031" cy="7315"/>
           </a:xfrm>
           <a:prstGeom prst="rect">
@@ -51518,19 +52622,70 @@
       </p:sp>
       <p:sp>
         <p:nvSpPr>
-          <p:cNvPr id="15" name=""/>
-          <p:cNvSpPr>
-            <a:spLocks noGrp="1"/>
-          </p:cNvSpPr>
-          <p:nvPr>
-            </p:nvPr>
-        </p:nvSpPr>
-        <p:spPr>
-          <a:xfrm>
-            <a:off x="452628" y="3429000"/>
-            <a:ext cx="502920" cy="502920"/>
-          </a:xfrm>
-          <a:prstGeom prst="ellipse">
+          <p:cNvPr id="37" name=""/>
+          <p:cNvSpPr>
+            <a:spLocks noGrp="1"/>
+          </p:cNvSpPr>
+          <p:nvPr>
+            </p:nvPr>
+        </p:nvSpPr>
+        <p:spPr>
+          <a:xfrm>
+            <a:off x="361188" y="3236976"/>
+            <a:ext cx="3017520" cy="292608"/>
+          </a:xfrm>
+          <a:prstGeom prst="rect">
+            <a:avLst/>
+          </a:prstGeom>
+        </p:spPr>
+        <p:txBody>
+          <a:bodyPr/>
+          <a:lstStyle/>
+          <a:p>
+            <a:pPr algn="l" marL="0" marR="0">
+              <a:lnSpc>
+                <a:spcPct val="100000"/>
+              </a:lnSpc>
+              <a:spcBef>
+                <a:spcPts val="0"/>
+              </a:spcBef>
+              <a:spcAft>
+                <a:spcPts val="0"/>
+              </a:spcAft>
+              <a:buNone/>
+            </a:pPr>
+            <a:r>
+              <a:rPr cap="none" sz="1400" i="0" b="1" u="none" strike="noStrike">
+                <a:solidFill>
+                  <a:srgbClr val="081F5C">
+                    <a:alpha val="100000"/>
+                  </a:srgbClr>
+                </a:solidFill>
+                <a:latin typeface="Arial"/>
+                <a:ea typeface="Arial"/>
+                <a:cs typeface="Arial"/>
+                <a:sym typeface="Arial"/>
+              </a:rPr>
+              <a:t>Tutoría académica</a:t>
+            </a:r>
+          </a:p>
+        </p:txBody>
+      </p:sp>
+      <p:sp>
+        <p:nvSpPr>
+          <p:cNvPr id="38" name=""/>
+          <p:cNvSpPr>
+            <a:spLocks noGrp="1"/>
+          </p:cNvSpPr>
+          <p:nvPr>
+            </p:nvPr>
+        </p:nvSpPr>
+        <p:spPr>
+          <a:xfrm>
+            <a:off x="3863340" y="3346704"/>
+            <a:ext cx="3017520" cy="73152"/>
+          </a:xfrm>
+          <a:prstGeom prst="rect">
             <a:avLst/>
           </a:prstGeom>
           <a:solidFill>
@@ -51561,44 +52716,64 @@
           </a:p>
         </p:txBody>
       </p:sp>
-      <p:pic>
-        <p:nvPicPr>
-          <p:cNvPr id="16" name="" descr=""/>
-          <p:cNvPicPr>
-            <a:picLocks noGrp="1"/>
-          </p:cNvPicPr>
-          <p:nvPr>
-            </p:nvPr>
-        </p:nvPicPr>
-        <p:blipFill>
-          <a:blip r:embed="rId4"/>
-          <a:stretch>
-            <a:fillRect/>
-          </a:stretch>
-        </p:blipFill>
-        <p:spPr>
-          <a:xfrm>
-            <a:off x="573329" y="3549701"/>
-            <a:ext cx="261518" cy="261518"/>
-          </a:xfrm>
-          <a:prstGeom prst="rect">
-            <a:avLst/>
-          </a:prstGeom>
-        </p:spPr>
-      </p:pic>
-      <p:sp>
-        <p:nvSpPr>
-          <p:cNvPr id="17" name=""/>
-          <p:cNvSpPr>
-            <a:spLocks noGrp="1"/>
-          </p:cNvSpPr>
-          <p:nvPr>
-            </p:nvPr>
-        </p:nvSpPr>
-        <p:spPr>
-          <a:xfrm>
-            <a:off x="1138428" y="3410712"/>
-            <a:ext cx="10765231" cy="292608"/>
+      <p:sp>
+        <p:nvSpPr>
+          <p:cNvPr id="39" name=""/>
+          <p:cNvSpPr>
+            <a:spLocks noGrp="1"/>
+          </p:cNvSpPr>
+          <p:nvPr>
+            </p:nvPr>
+        </p:nvSpPr>
+        <p:spPr>
+          <a:xfrm>
+            <a:off x="6771132" y="3273552"/>
+            <a:ext cx="219456" cy="219456"/>
+          </a:xfrm>
+          <a:prstGeom prst="ellipse">
+            <a:avLst/>
+          </a:prstGeom>
+          <a:solidFill>
+            <a:srgbClr val="0B4F8C">
+              <a:alpha val="100000"/>
+            </a:srgbClr>
+          </a:solidFill>
+          <a:ln w="12700" cap="rnd" cmpd="sng">
+            <a:solidFill>
+              <a:srgbClr val="FFFFFF">
+                <a:alpha val="100000"/>
+              </a:srgbClr>
+            </a:solidFill>
+            <a:prstDash val="solid"/>
+            <a:round/>
+            <a:headEnd type="none" w="med" len="med"/>
+            <a:tailEnd type="none" w="med" len="med"/>
+          </a:ln>
+        </p:spPr>
+        <p:txBody>
+          <a:bodyPr/>
+          <a:lstStyle/>
+          <a:p>
+            <a:r>
+              <a:rPr/>
+              <a:t/>
+            </a:r>
+          </a:p>
+        </p:txBody>
+      </p:sp>
+      <p:sp>
+        <p:nvSpPr>
+          <p:cNvPr id="40" name=""/>
+          <p:cNvSpPr>
+            <a:spLocks noGrp="1"/>
+          </p:cNvSpPr>
+          <p:nvPr>
+            </p:nvPr>
+        </p:nvSpPr>
+        <p:spPr>
+          <a:xfrm>
+            <a:off x="6990588" y="3246120"/>
+            <a:ext cx="640080" cy="274320"/>
           </a:xfrm>
           <a:prstGeom prst="rect">
             <a:avLst/>
@@ -51621,7 +52796,7 @@
               <a:buNone/>
             </a:pPr>
             <a:r>
-              <a:rPr cap="none" sz="1400" i="0" b="1" u="none" strike="noStrike">
+              <a:rPr cap="none" sz="1200" i="0" b="1" u="none" strike="noStrike">
                 <a:solidFill>
                   <a:srgbClr val="081F5C">
                     <a:alpha val="100000"/>
@@ -51632,34 +52807,79 @@
                 <a:cs typeface="Arial"/>
                 <a:sym typeface="Arial"/>
               </a:rPr>
-              <a:t>Diagrama de flecha de los factores</a:t>
-            </a:r>
-          </a:p>
-        </p:txBody>
-      </p:sp>
-      <p:sp>
-        <p:nvSpPr>
-          <p:cNvPr id="18" name=""/>
-          <p:cNvSpPr>
-            <a:spLocks noGrp="1"/>
-          </p:cNvSpPr>
-          <p:nvPr>
-            </p:nvPr>
-        </p:nvSpPr>
-        <p:spPr>
-          <a:xfrm>
-            <a:off x="1138428" y="3703320"/>
-            <a:ext cx="10765231" cy="457200"/>
-          </a:xfrm>
-          <a:prstGeom prst="rect">
-            <a:avLst/>
-          </a:prstGeom>
-        </p:spPr>
-        <p:txBody>
-          <a:bodyPr/>
-          <a:lstStyle/>
-          <a:p>
-            <a:pPr algn="l" marL="0" marR="0">
+              <a:t>83%</a:t>
+            </a:r>
+          </a:p>
+        </p:txBody>
+      </p:sp>
+      <p:sp>
+        <p:nvSpPr>
+          <p:cNvPr id="41" name=""/>
+          <p:cNvSpPr>
+            <a:spLocks noGrp="1"/>
+          </p:cNvSpPr>
+          <p:nvPr>
+            </p:nvPr>
+        </p:nvSpPr>
+        <p:spPr>
+          <a:xfrm>
+            <a:off x="3753612" y="3273552"/>
+            <a:ext cx="219456" cy="219456"/>
+          </a:xfrm>
+          <a:prstGeom prst="ellipse">
+            <a:avLst/>
+          </a:prstGeom>
+          <a:solidFill>
+            <a:srgbClr val="2A9D8F">
+              <a:alpha val="100000"/>
+            </a:srgbClr>
+          </a:solidFill>
+          <a:ln w="12700" cap="rnd" cmpd="sng">
+            <a:solidFill>
+              <a:srgbClr val="FFFFFF">
+                <a:alpha val="100000"/>
+              </a:srgbClr>
+            </a:solidFill>
+            <a:prstDash val="solid"/>
+            <a:round/>
+            <a:headEnd type="none" w="med" len="med"/>
+            <a:tailEnd type="none" w="med" len="med"/>
+          </a:ln>
+        </p:spPr>
+        <p:txBody>
+          <a:bodyPr/>
+          <a:lstStyle/>
+          <a:p>
+            <a:r>
+              <a:rPr/>
+              <a:t/>
+            </a:r>
+          </a:p>
+        </p:txBody>
+      </p:sp>
+      <p:sp>
+        <p:nvSpPr>
+          <p:cNvPr id="42" name=""/>
+          <p:cNvSpPr>
+            <a:spLocks noGrp="1"/>
+          </p:cNvSpPr>
+          <p:nvPr>
+            </p:nvPr>
+        </p:nvSpPr>
+        <p:spPr>
+          <a:xfrm>
+            <a:off x="3113532" y="3246120"/>
+            <a:ext cx="640080" cy="274320"/>
+          </a:xfrm>
+          <a:prstGeom prst="rect">
+            <a:avLst/>
+          </a:prstGeom>
+        </p:spPr>
+        <p:txBody>
+          <a:bodyPr/>
+          <a:lstStyle/>
+          <a:p>
+            <a:pPr algn="r" marL="0" marR="0">
               <a:lnSpc>
                 <a:spcPct val="100000"/>
               </a:lnSpc>
@@ -51672,9 +52892,9 @@
               <a:buNone/>
             </a:pPr>
             <a:r>
-              <a:rPr cap="none" sz="1250" i="0" b="0" u="none" strike="noStrike">
-                <a:solidFill>
-                  <a:srgbClr val="5A6480">
+              <a:rPr cap="none" sz="1200" i="0" b="1" u="none" strike="noStrike">
+                <a:solidFill>
+                  <a:srgbClr val="081F5C">
                     <a:alpha val="100000"/>
                   </a:srgbClr>
                 </a:solidFill>
@@ -51683,23 +52903,74 @@
                 <a:cs typeface="Arial"/>
                 <a:sym typeface="Arial"/>
               </a:rPr>
-              <a:t>Es decorativo. El peso de cada aspecto se lee mejor con puntos, como en la propuesta 4.</a:t>
-            </a:r>
-          </a:p>
-        </p:txBody>
-      </p:sp>
-      <p:sp>
-        <p:nvSpPr>
-          <p:cNvPr id="19" name=""/>
-          <p:cNvSpPr>
-            <a:spLocks noGrp="1"/>
-          </p:cNvSpPr>
-          <p:nvPr>
-            </p:nvPr>
-        </p:nvSpPr>
-        <p:spPr>
-          <a:xfrm>
-            <a:off x="452628" y="4251960"/>
+              <a:t>53%</a:t>
+            </a:r>
+          </a:p>
+        </p:txBody>
+      </p:sp>
+      <p:sp>
+        <p:nvSpPr>
+          <p:cNvPr id="43" name=""/>
+          <p:cNvSpPr>
+            <a:spLocks noGrp="1"/>
+          </p:cNvSpPr>
+          <p:nvPr>
+            </p:nvPr>
+        </p:nvSpPr>
+        <p:spPr>
+          <a:xfrm>
+            <a:off x="9368028" y="3246120"/>
+            <a:ext cx="2535631" cy="274320"/>
+          </a:xfrm>
+          <a:prstGeom prst="rect">
+            <a:avLst/>
+          </a:prstGeom>
+        </p:spPr>
+        <p:txBody>
+          <a:bodyPr/>
+          <a:lstStyle/>
+          <a:p>
+            <a:pPr algn="l" marL="0" marR="0">
+              <a:lnSpc>
+                <a:spcPct val="100000"/>
+              </a:lnSpc>
+              <a:spcBef>
+                <a:spcPts val="0"/>
+              </a:spcBef>
+              <a:spcAft>
+                <a:spcPts val="0"/>
+              </a:spcAft>
+              <a:buNone/>
+            </a:pPr>
+            <a:r>
+              <a:rPr cap="none" sz="1300" i="0" b="1" u="none" strike="noStrike">
+                <a:solidFill>
+                  <a:srgbClr val="081F5C">
+                    <a:alpha val="100000"/>
+                  </a:srgbClr>
+                </a:solidFill>
+                <a:latin typeface="Arial"/>
+                <a:ea typeface="Arial"/>
+                <a:cs typeface="Arial"/>
+                <a:sym typeface="Arial"/>
+              </a:rPr>
+              <a:t>Diferencia clara</a:t>
+            </a:r>
+          </a:p>
+        </p:txBody>
+      </p:sp>
+      <p:sp>
+        <p:nvSpPr>
+          <p:cNvPr id="44" name=""/>
+          <p:cNvSpPr>
+            <a:spLocks noGrp="1"/>
+          </p:cNvSpPr>
+          <p:nvPr>
+            </p:nvPr>
+        </p:nvSpPr>
+        <p:spPr>
+          <a:xfrm>
+            <a:off x="452628" y="3666744"/>
             <a:ext cx="11451031" cy="7315"/>
           </a:xfrm>
           <a:prstGeom prst="rect">
@@ -51735,29 +53006,80 @@
       </p:sp>
       <p:sp>
         <p:nvSpPr>
-          <p:cNvPr id="20" name=""/>
-          <p:cNvSpPr>
-            <a:spLocks noGrp="1"/>
-          </p:cNvSpPr>
-          <p:nvPr>
-            </p:nvPr>
-        </p:nvSpPr>
-        <p:spPr>
-          <a:xfrm>
-            <a:off x="452628" y="4389120"/>
-            <a:ext cx="502920" cy="502920"/>
-          </a:xfrm>
-          <a:prstGeom prst="ellipse">
+          <p:cNvPr id="45" name=""/>
+          <p:cNvSpPr>
+            <a:spLocks noGrp="1"/>
+          </p:cNvSpPr>
+          <p:nvPr>
+            </p:nvPr>
+        </p:nvSpPr>
+        <p:spPr>
+          <a:xfrm>
+            <a:off x="361188" y="3803904"/>
+            <a:ext cx="3017520" cy="292608"/>
+          </a:xfrm>
+          <a:prstGeom prst="rect">
+            <a:avLst/>
+          </a:prstGeom>
+        </p:spPr>
+        <p:txBody>
+          <a:bodyPr/>
+          <a:lstStyle/>
+          <a:p>
+            <a:pPr algn="l" marL="0" marR="0">
+              <a:lnSpc>
+                <a:spcPct val="100000"/>
+              </a:lnSpc>
+              <a:spcBef>
+                <a:spcPts val="0"/>
+              </a:spcBef>
+              <a:spcAft>
+                <a:spcPts val="0"/>
+              </a:spcAft>
+              <a:buNone/>
+            </a:pPr>
+            <a:r>
+              <a:rPr cap="none" sz="1400" i="0" b="0" u="none" strike="noStrike">
+                <a:solidFill>
+                  <a:srgbClr val="081F5C">
+                    <a:alpha val="100000"/>
+                  </a:srgbClr>
+                </a:solidFill>
+                <a:latin typeface="Arial"/>
+                <a:ea typeface="Arial"/>
+                <a:cs typeface="Arial"/>
+                <a:sym typeface="Arial"/>
+              </a:rPr>
+              <a:t>Tutoría socioemocional</a:t>
+            </a:r>
+          </a:p>
+        </p:txBody>
+      </p:sp>
+      <p:sp>
+        <p:nvSpPr>
+          <p:cNvPr id="46" name=""/>
+          <p:cNvSpPr>
+            <a:spLocks noGrp="1"/>
+          </p:cNvSpPr>
+          <p:nvPr>
+            </p:nvPr>
+        </p:nvSpPr>
+        <p:spPr>
+          <a:xfrm>
+            <a:off x="6076188" y="3939235"/>
+            <a:ext cx="201168" cy="21946"/>
+          </a:xfrm>
+          <a:prstGeom prst="rect">
             <a:avLst/>
           </a:prstGeom>
           <a:solidFill>
-            <a:srgbClr val="081F5C">
+            <a:srgbClr val="C9CED8">
               <a:alpha val="100000"/>
             </a:srgbClr>
           </a:solidFill>
           <a:ln w="3175" cap="rnd" cmpd="sng">
             <a:solidFill>
-              <a:srgbClr val="081F5C">
+              <a:srgbClr val="C9CED8">
                 <a:alpha val="100000"/>
               </a:srgbClr>
             </a:solidFill>
@@ -51778,54 +53100,74 @@
           </a:p>
         </p:txBody>
       </p:sp>
-      <p:pic>
-        <p:nvPicPr>
-          <p:cNvPr id="21" name="" descr=""/>
-          <p:cNvPicPr>
-            <a:picLocks noGrp="1"/>
-          </p:cNvPicPr>
-          <p:nvPr>
-            </p:nvPr>
-        </p:nvPicPr>
-        <p:blipFill>
-          <a:blip r:embed="rId5"/>
-          <a:stretch>
-            <a:fillRect/>
-          </a:stretch>
-        </p:blipFill>
-        <p:spPr>
-          <a:xfrm>
-            <a:off x="573329" y="4509821"/>
-            <a:ext cx="261518" cy="261518"/>
-          </a:xfrm>
-          <a:prstGeom prst="rect">
-            <a:avLst/>
-          </a:prstGeom>
-        </p:spPr>
-      </p:pic>
-      <p:sp>
-        <p:nvSpPr>
-          <p:cNvPr id="22" name=""/>
-          <p:cNvSpPr>
-            <a:spLocks noGrp="1"/>
-          </p:cNvSpPr>
-          <p:nvPr>
-            </p:nvPr>
-        </p:nvSpPr>
-        <p:spPr>
-          <a:xfrm>
-            <a:off x="1138428" y="4370832"/>
-            <a:ext cx="10765231" cy="292608"/>
-          </a:xfrm>
-          <a:prstGeom prst="rect">
-            <a:avLst/>
-          </a:prstGeom>
-        </p:spPr>
-        <p:txBody>
-          <a:bodyPr/>
-          <a:lstStyle/>
-          <a:p>
-            <a:pPr algn="l" marL="0" marR="0">
+      <p:sp>
+        <p:nvSpPr>
+          <p:cNvPr id="47" name=""/>
+          <p:cNvSpPr>
+            <a:spLocks noGrp="1"/>
+          </p:cNvSpPr>
+          <p:nvPr>
+            </p:nvPr>
+        </p:nvSpPr>
+        <p:spPr>
+          <a:xfrm>
+            <a:off x="5966460" y="3840480"/>
+            <a:ext cx="219456" cy="219456"/>
+          </a:xfrm>
+          <a:prstGeom prst="ellipse">
+            <a:avLst/>
+          </a:prstGeom>
+          <a:solidFill>
+            <a:srgbClr val="0B4F8C">
+              <a:alpha val="100000"/>
+            </a:srgbClr>
+          </a:solidFill>
+          <a:ln w="12700" cap="rnd" cmpd="sng">
+            <a:solidFill>
+              <a:srgbClr val="FFFFFF">
+                <a:alpha val="100000"/>
+              </a:srgbClr>
+            </a:solidFill>
+            <a:prstDash val="solid"/>
+            <a:round/>
+            <a:headEnd type="none" w="med" len="med"/>
+            <a:tailEnd type="none" w="med" len="med"/>
+          </a:ln>
+        </p:spPr>
+        <p:txBody>
+          <a:bodyPr/>
+          <a:lstStyle/>
+          <a:p>
+            <a:r>
+              <a:rPr/>
+              <a:t/>
+            </a:r>
+          </a:p>
+        </p:txBody>
+      </p:sp>
+      <p:sp>
+        <p:nvSpPr>
+          <p:cNvPr id="48" name=""/>
+          <p:cNvSpPr>
+            <a:spLocks noGrp="1"/>
+          </p:cNvSpPr>
+          <p:nvPr>
+            </p:nvPr>
+        </p:nvSpPr>
+        <p:spPr>
+          <a:xfrm>
+            <a:off x="5326380" y="3813048"/>
+            <a:ext cx="640080" cy="274320"/>
+          </a:xfrm>
+          <a:prstGeom prst="rect">
+            <a:avLst/>
+          </a:prstGeom>
+        </p:spPr>
+        <p:txBody>
+          <a:bodyPr/>
+          <a:lstStyle/>
+          <a:p>
+            <a:pPr algn="r" marL="0" marR="0">
               <a:lnSpc>
                 <a:spcPct val="100000"/>
               </a:lnSpc>
@@ -51838,7 +53180,7 @@
               <a:buNone/>
             </a:pPr>
             <a:r>
-              <a:rPr cap="none" sz="1400" i="0" b="1" u="none" strike="noStrike">
+              <a:rPr cap="none" sz="1200" i="0" b="1" u="none" strike="noStrike">
                 <a:solidFill>
                   <a:srgbClr val="081F5C">
                     <a:alpha val="100000"/>
@@ -51849,24 +53191,69 @@
                 <a:cs typeface="Arial"/>
                 <a:sym typeface="Arial"/>
               </a:rPr>
-              <a:t>Colores por factor y celdas de color</a:t>
-            </a:r>
-          </a:p>
-        </p:txBody>
-      </p:sp>
-      <p:sp>
-        <p:nvSpPr>
-          <p:cNvPr id="23" name=""/>
-          <p:cNvSpPr>
-            <a:spLocks noGrp="1"/>
-          </p:cNvSpPr>
-          <p:nvPr>
-            </p:nvPr>
-        </p:nvSpPr>
-        <p:spPr>
-          <a:xfrm>
-            <a:off x="1138428" y="4663440"/>
-            <a:ext cx="10765231" cy="457200"/>
+              <a:t>75%</a:t>
+            </a:r>
+          </a:p>
+        </p:txBody>
+      </p:sp>
+      <p:sp>
+        <p:nvSpPr>
+          <p:cNvPr id="49" name=""/>
+          <p:cNvSpPr>
+            <a:spLocks noGrp="1"/>
+          </p:cNvSpPr>
+          <p:nvPr>
+            </p:nvPr>
+        </p:nvSpPr>
+        <p:spPr>
+          <a:xfrm>
+            <a:off x="6167628" y="3840480"/>
+            <a:ext cx="219456" cy="219456"/>
+          </a:xfrm>
+          <a:prstGeom prst="ellipse">
+            <a:avLst/>
+          </a:prstGeom>
+          <a:solidFill>
+            <a:srgbClr val="2A9D8F">
+              <a:alpha val="100000"/>
+            </a:srgbClr>
+          </a:solidFill>
+          <a:ln w="12700" cap="rnd" cmpd="sng">
+            <a:solidFill>
+              <a:srgbClr val="FFFFFF">
+                <a:alpha val="100000"/>
+              </a:srgbClr>
+            </a:solidFill>
+            <a:prstDash val="solid"/>
+            <a:round/>
+            <a:headEnd type="none" w="med" len="med"/>
+            <a:tailEnd type="none" w="med" len="med"/>
+          </a:ln>
+        </p:spPr>
+        <p:txBody>
+          <a:bodyPr/>
+          <a:lstStyle/>
+          <a:p>
+            <a:r>
+              <a:rPr/>
+              <a:t/>
+            </a:r>
+          </a:p>
+        </p:txBody>
+      </p:sp>
+      <p:sp>
+        <p:nvSpPr>
+          <p:cNvPr id="50" name=""/>
+          <p:cNvSpPr>
+            <a:spLocks noGrp="1"/>
+          </p:cNvSpPr>
+          <p:nvPr>
+            </p:nvPr>
+        </p:nvSpPr>
+        <p:spPr>
+          <a:xfrm>
+            <a:off x="6387084" y="3813048"/>
+            <a:ext cx="640080" cy="274320"/>
           </a:xfrm>
           <a:prstGeom prst="rect">
             <a:avLst/>
@@ -51889,9 +53276,9 @@
               <a:buNone/>
             </a:pPr>
             <a:r>
-              <a:rPr cap="none" sz="1250" i="0" b="0" u="none" strike="noStrike">
-                <a:solidFill>
-                  <a:srgbClr val="5A6480">
+              <a:rPr cap="none" sz="1200" i="0" b="1" u="none" strike="noStrike">
+                <a:solidFill>
+                  <a:srgbClr val="081F5C">
                     <a:alpha val="100000"/>
                   </a:srgbClr>
                 </a:solidFill>
@@ -51900,14 +53287,935 @@
                 <a:cs typeface="Arial"/>
                 <a:sym typeface="Arial"/>
               </a:rPr>
-              <a:t>Rompen la paleta: en PULSO el color dice la respuesta, no el tema.</a:t>
-            </a:r>
-          </a:p>
-        </p:txBody>
-      </p:sp>
-      <p:sp>
-        <p:nvSpPr>
-          <p:cNvPr id="24" name=""/>
+              <a:t>77%</a:t>
+            </a:r>
+          </a:p>
+        </p:txBody>
+      </p:sp>
+      <p:sp>
+        <p:nvSpPr>
+          <p:cNvPr id="51" name=""/>
+          <p:cNvSpPr>
+            <a:spLocks noGrp="1"/>
+          </p:cNvSpPr>
+          <p:nvPr>
+            </p:nvPr>
+        </p:nvSpPr>
+        <p:spPr>
+          <a:xfrm>
+            <a:off x="9368028" y="3813048"/>
+            <a:ext cx="2535631" cy="274320"/>
+          </a:xfrm>
+          <a:prstGeom prst="rect">
+            <a:avLst/>
+          </a:prstGeom>
+        </p:spPr>
+        <p:txBody>
+          <a:bodyPr/>
+          <a:lstStyle/>
+          <a:p>
+            <a:pPr algn="l" marL="0" marR="0">
+              <a:lnSpc>
+                <a:spcPct val="100000"/>
+              </a:lnSpc>
+              <a:spcBef>
+                <a:spcPts val="0"/>
+              </a:spcBef>
+              <a:spcAft>
+                <a:spcPts val="0"/>
+              </a:spcAft>
+              <a:buNone/>
+            </a:pPr>
+            <a:r>
+              <a:rPr cap="none" sz="1300" i="0" b="0" u="none" strike="noStrike">
+                <a:solidFill>
+                  <a:srgbClr val="5A6480">
+                    <a:alpha val="100000"/>
+                  </a:srgbClr>
+                </a:solidFill>
+                <a:latin typeface="Arial"/>
+                <a:ea typeface="Arial"/>
+                <a:cs typeface="Arial"/>
+                <a:sym typeface="Arial"/>
+              </a:rPr>
+              <a:t>Sin diferencia clara</a:t>
+            </a:r>
+          </a:p>
+        </p:txBody>
+      </p:sp>
+      <p:sp>
+        <p:nvSpPr>
+          <p:cNvPr id="52" name=""/>
+          <p:cNvSpPr>
+            <a:spLocks noGrp="1"/>
+          </p:cNvSpPr>
+          <p:nvPr>
+            </p:nvPr>
+        </p:nvSpPr>
+        <p:spPr>
+          <a:xfrm>
+            <a:off x="452628" y="4233672"/>
+            <a:ext cx="11451031" cy="7315"/>
+          </a:xfrm>
+          <a:prstGeom prst="rect">
+            <a:avLst/>
+          </a:prstGeom>
+          <a:solidFill>
+            <a:srgbClr val="D5D9DF">
+              <a:alpha val="100000"/>
+            </a:srgbClr>
+          </a:solidFill>
+          <a:ln w="3175" cap="rnd" cmpd="sng">
+            <a:solidFill>
+              <a:srgbClr val="D5D9DF">
+                <a:alpha val="100000"/>
+              </a:srgbClr>
+            </a:solidFill>
+            <a:prstDash val="solid"/>
+            <a:round/>
+            <a:headEnd type="none" w="med" len="med"/>
+            <a:tailEnd type="none" w="med" len="med"/>
+          </a:ln>
+        </p:spPr>
+        <p:txBody>
+          <a:bodyPr/>
+          <a:lstStyle/>
+          <a:p>
+            <a:r>
+              <a:rPr/>
+              <a:t/>
+            </a:r>
+          </a:p>
+        </p:txBody>
+      </p:sp>
+      <p:sp>
+        <p:nvSpPr>
+          <p:cNvPr id="53" name=""/>
+          <p:cNvSpPr>
+            <a:spLocks noGrp="1"/>
+          </p:cNvSpPr>
+          <p:nvPr>
+            </p:nvPr>
+        </p:nvSpPr>
+        <p:spPr>
+          <a:xfrm>
+            <a:off x="361188" y="4370832"/>
+            <a:ext cx="3017520" cy="292608"/>
+          </a:xfrm>
+          <a:prstGeom prst="rect">
+            <a:avLst/>
+          </a:prstGeom>
+        </p:spPr>
+        <p:txBody>
+          <a:bodyPr/>
+          <a:lstStyle/>
+          <a:p>
+            <a:pPr algn="l" marL="0" marR="0">
+              <a:lnSpc>
+                <a:spcPct val="100000"/>
+              </a:lnSpc>
+              <a:spcBef>
+                <a:spcPts val="0"/>
+              </a:spcBef>
+              <a:spcAft>
+                <a:spcPts val="0"/>
+              </a:spcAft>
+              <a:buNone/>
+            </a:pPr>
+            <a:r>
+              <a:rPr cap="none" sz="1400" i="0" b="0" u="none" strike="noStrike">
+                <a:solidFill>
+                  <a:srgbClr val="081F5C">
+                    <a:alpha val="100000"/>
+                  </a:srgbClr>
+                </a:solidFill>
+                <a:latin typeface="Arial"/>
+                <a:ea typeface="Arial"/>
+                <a:cs typeface="Arial"/>
+                <a:sym typeface="Arial"/>
+              </a:rPr>
+              <a:t>Auditoría</a:t>
+            </a:r>
+          </a:p>
+        </p:txBody>
+      </p:sp>
+      <p:sp>
+        <p:nvSpPr>
+          <p:cNvPr id="54" name=""/>
+          <p:cNvSpPr>
+            <a:spLocks noGrp="1"/>
+          </p:cNvSpPr>
+          <p:nvPr>
+            </p:nvPr>
+        </p:nvSpPr>
+        <p:spPr>
+          <a:xfrm>
+            <a:off x="7685532" y="4506163"/>
+            <a:ext cx="502920" cy="21946"/>
+          </a:xfrm>
+          <a:prstGeom prst="rect">
+            <a:avLst/>
+          </a:prstGeom>
+          <a:solidFill>
+            <a:srgbClr val="C9CED8">
+              <a:alpha val="100000"/>
+            </a:srgbClr>
+          </a:solidFill>
+          <a:ln w="3175" cap="rnd" cmpd="sng">
+            <a:solidFill>
+              <a:srgbClr val="C9CED8">
+                <a:alpha val="100000"/>
+              </a:srgbClr>
+            </a:solidFill>
+            <a:prstDash val="solid"/>
+            <a:round/>
+            <a:headEnd type="none" w="med" len="med"/>
+            <a:tailEnd type="none" w="med" len="med"/>
+          </a:ln>
+        </p:spPr>
+        <p:txBody>
+          <a:bodyPr/>
+          <a:lstStyle/>
+          <a:p>
+            <a:r>
+              <a:rPr/>
+              <a:t/>
+            </a:r>
+          </a:p>
+        </p:txBody>
+      </p:sp>
+      <p:sp>
+        <p:nvSpPr>
+          <p:cNvPr id="55" name=""/>
+          <p:cNvSpPr>
+            <a:spLocks noGrp="1"/>
+          </p:cNvSpPr>
+          <p:nvPr>
+            </p:nvPr>
+        </p:nvSpPr>
+        <p:spPr>
+          <a:xfrm>
+            <a:off x="8078724" y="4407408"/>
+            <a:ext cx="219456" cy="219456"/>
+          </a:xfrm>
+          <a:prstGeom prst="ellipse">
+            <a:avLst/>
+          </a:prstGeom>
+          <a:solidFill>
+            <a:srgbClr val="0B4F8C">
+              <a:alpha val="100000"/>
+            </a:srgbClr>
+          </a:solidFill>
+          <a:ln w="12700" cap="rnd" cmpd="sng">
+            <a:solidFill>
+              <a:srgbClr val="FFFFFF">
+                <a:alpha val="100000"/>
+              </a:srgbClr>
+            </a:solidFill>
+            <a:prstDash val="solid"/>
+            <a:round/>
+            <a:headEnd type="none" w="med" len="med"/>
+            <a:tailEnd type="none" w="med" len="med"/>
+          </a:ln>
+        </p:spPr>
+        <p:txBody>
+          <a:bodyPr/>
+          <a:lstStyle/>
+          <a:p>
+            <a:r>
+              <a:rPr/>
+              <a:t/>
+            </a:r>
+          </a:p>
+        </p:txBody>
+      </p:sp>
+      <p:sp>
+        <p:nvSpPr>
+          <p:cNvPr id="56" name=""/>
+          <p:cNvSpPr>
+            <a:spLocks noGrp="1"/>
+          </p:cNvSpPr>
+          <p:nvPr>
+            </p:nvPr>
+        </p:nvSpPr>
+        <p:spPr>
+          <a:xfrm>
+            <a:off x="8298180" y="4379976"/>
+            <a:ext cx="640080" cy="274320"/>
+          </a:xfrm>
+          <a:prstGeom prst="rect">
+            <a:avLst/>
+          </a:prstGeom>
+        </p:spPr>
+        <p:txBody>
+          <a:bodyPr/>
+          <a:lstStyle/>
+          <a:p>
+            <a:pPr algn="l" marL="0" marR="0">
+              <a:lnSpc>
+                <a:spcPct val="100000"/>
+              </a:lnSpc>
+              <a:spcBef>
+                <a:spcPts val="0"/>
+              </a:spcBef>
+              <a:spcAft>
+                <a:spcPts val="0"/>
+              </a:spcAft>
+              <a:buNone/>
+            </a:pPr>
+            <a:r>
+              <a:rPr cap="none" sz="1200" i="0" b="1" u="none" strike="noStrike">
+                <a:solidFill>
+                  <a:srgbClr val="081F5C">
+                    <a:alpha val="100000"/>
+                  </a:srgbClr>
+                </a:solidFill>
+                <a:latin typeface="Arial"/>
+                <a:ea typeface="Arial"/>
+                <a:cs typeface="Arial"/>
+                <a:sym typeface="Arial"/>
+              </a:rPr>
+              <a:t>96%</a:t>
+            </a:r>
+          </a:p>
+        </p:txBody>
+      </p:sp>
+      <p:sp>
+        <p:nvSpPr>
+          <p:cNvPr id="57" name=""/>
+          <p:cNvSpPr>
+            <a:spLocks noGrp="1"/>
+          </p:cNvSpPr>
+          <p:nvPr>
+            </p:nvPr>
+        </p:nvSpPr>
+        <p:spPr>
+          <a:xfrm>
+            <a:off x="7575804" y="4407408"/>
+            <a:ext cx="219456" cy="219456"/>
+          </a:xfrm>
+          <a:prstGeom prst="ellipse">
+            <a:avLst/>
+          </a:prstGeom>
+          <a:solidFill>
+            <a:srgbClr val="2A9D8F">
+              <a:alpha val="100000"/>
+            </a:srgbClr>
+          </a:solidFill>
+          <a:ln w="12700" cap="rnd" cmpd="sng">
+            <a:solidFill>
+              <a:srgbClr val="FFFFFF">
+                <a:alpha val="100000"/>
+              </a:srgbClr>
+            </a:solidFill>
+            <a:prstDash val="solid"/>
+            <a:round/>
+            <a:headEnd type="none" w="med" len="med"/>
+            <a:tailEnd type="none" w="med" len="med"/>
+          </a:ln>
+        </p:spPr>
+        <p:txBody>
+          <a:bodyPr/>
+          <a:lstStyle/>
+          <a:p>
+            <a:r>
+              <a:rPr/>
+              <a:t/>
+            </a:r>
+          </a:p>
+        </p:txBody>
+      </p:sp>
+      <p:sp>
+        <p:nvSpPr>
+          <p:cNvPr id="58" name=""/>
+          <p:cNvSpPr>
+            <a:spLocks noGrp="1"/>
+          </p:cNvSpPr>
+          <p:nvPr>
+            </p:nvPr>
+        </p:nvSpPr>
+        <p:spPr>
+          <a:xfrm>
+            <a:off x="6935724" y="4379976"/>
+            <a:ext cx="640080" cy="274320"/>
+          </a:xfrm>
+          <a:prstGeom prst="rect">
+            <a:avLst/>
+          </a:prstGeom>
+        </p:spPr>
+        <p:txBody>
+          <a:bodyPr/>
+          <a:lstStyle/>
+          <a:p>
+            <a:pPr algn="r" marL="0" marR="0">
+              <a:lnSpc>
+                <a:spcPct val="100000"/>
+              </a:lnSpc>
+              <a:spcBef>
+                <a:spcPts val="0"/>
+              </a:spcBef>
+              <a:spcAft>
+                <a:spcPts val="0"/>
+              </a:spcAft>
+              <a:buNone/>
+            </a:pPr>
+            <a:r>
+              <a:rPr cap="none" sz="1200" i="0" b="1" u="none" strike="noStrike">
+                <a:solidFill>
+                  <a:srgbClr val="081F5C">
+                    <a:alpha val="100000"/>
+                  </a:srgbClr>
+                </a:solidFill>
+                <a:latin typeface="Arial"/>
+                <a:ea typeface="Arial"/>
+                <a:cs typeface="Arial"/>
+                <a:sym typeface="Arial"/>
+              </a:rPr>
+              <a:t>91%</a:t>
+            </a:r>
+          </a:p>
+        </p:txBody>
+      </p:sp>
+      <p:sp>
+        <p:nvSpPr>
+          <p:cNvPr id="59" name=""/>
+          <p:cNvSpPr>
+            <a:spLocks noGrp="1"/>
+          </p:cNvSpPr>
+          <p:nvPr>
+            </p:nvPr>
+        </p:nvSpPr>
+        <p:spPr>
+          <a:xfrm>
+            <a:off x="9368028" y="4379976"/>
+            <a:ext cx="2535631" cy="274320"/>
+          </a:xfrm>
+          <a:prstGeom prst="rect">
+            <a:avLst/>
+          </a:prstGeom>
+        </p:spPr>
+        <p:txBody>
+          <a:bodyPr/>
+          <a:lstStyle/>
+          <a:p>
+            <a:pPr algn="l" marL="0" marR="0">
+              <a:lnSpc>
+                <a:spcPct val="100000"/>
+              </a:lnSpc>
+              <a:spcBef>
+                <a:spcPts val="0"/>
+              </a:spcBef>
+              <a:spcAft>
+                <a:spcPts val="0"/>
+              </a:spcAft>
+              <a:buNone/>
+            </a:pPr>
+            <a:r>
+              <a:rPr cap="none" sz="1300" i="0" b="0" u="none" strike="noStrike">
+                <a:solidFill>
+                  <a:srgbClr val="5A6480">
+                    <a:alpha val="100000"/>
+                  </a:srgbClr>
+                </a:solidFill>
+                <a:latin typeface="Arial"/>
+                <a:ea typeface="Arial"/>
+                <a:cs typeface="Arial"/>
+                <a:sym typeface="Arial"/>
+              </a:rPr>
+              <a:t>Sin diferencia clara</a:t>
+            </a:r>
+          </a:p>
+        </p:txBody>
+      </p:sp>
+      <p:sp>
+        <p:nvSpPr>
+          <p:cNvPr id="60" name=""/>
+          <p:cNvSpPr>
+            <a:spLocks noGrp="1"/>
+          </p:cNvSpPr>
+          <p:nvPr>
+            </p:nvPr>
+        </p:nvSpPr>
+        <p:spPr>
+          <a:xfrm>
+            <a:off x="452628" y="4800600"/>
+            <a:ext cx="11451031" cy="7315"/>
+          </a:xfrm>
+          <a:prstGeom prst="rect">
+            <a:avLst/>
+          </a:prstGeom>
+          <a:solidFill>
+            <a:srgbClr val="D5D9DF">
+              <a:alpha val="100000"/>
+            </a:srgbClr>
+          </a:solidFill>
+          <a:ln w="3175" cap="rnd" cmpd="sng">
+            <a:solidFill>
+              <a:srgbClr val="D5D9DF">
+                <a:alpha val="100000"/>
+              </a:srgbClr>
+            </a:solidFill>
+            <a:prstDash val="solid"/>
+            <a:round/>
+            <a:headEnd type="none" w="med" len="med"/>
+            <a:tailEnd type="none" w="med" len="med"/>
+          </a:ln>
+        </p:spPr>
+        <p:txBody>
+          <a:bodyPr/>
+          <a:lstStyle/>
+          <a:p>
+            <a:r>
+              <a:rPr/>
+              <a:t/>
+            </a:r>
+          </a:p>
+        </p:txBody>
+      </p:sp>
+      <p:sp>
+        <p:nvSpPr>
+          <p:cNvPr id="61" name=""/>
+          <p:cNvSpPr>
+            <a:spLocks noGrp="1"/>
+          </p:cNvSpPr>
+          <p:nvPr>
+            </p:nvPr>
+        </p:nvSpPr>
+        <p:spPr>
+          <a:xfrm>
+            <a:off x="361188" y="4937760"/>
+            <a:ext cx="3017520" cy="292608"/>
+          </a:xfrm>
+          <a:prstGeom prst="rect">
+            <a:avLst/>
+          </a:prstGeom>
+        </p:spPr>
+        <p:txBody>
+          <a:bodyPr/>
+          <a:lstStyle/>
+          <a:p>
+            <a:pPr algn="l" marL="0" marR="0">
+              <a:lnSpc>
+                <a:spcPct val="100000"/>
+              </a:lnSpc>
+              <a:spcBef>
+                <a:spcPts val="0"/>
+              </a:spcBef>
+              <a:spcAft>
+                <a:spcPts val="0"/>
+              </a:spcAft>
+              <a:buNone/>
+            </a:pPr>
+            <a:r>
+              <a:rPr cap="none" sz="1400" i="0" b="0" u="none" strike="noStrike">
+                <a:solidFill>
+                  <a:srgbClr val="081F5C">
+                    <a:alpha val="100000"/>
+                  </a:srgbClr>
+                </a:solidFill>
+                <a:latin typeface="Arial"/>
+                <a:ea typeface="Arial"/>
+                <a:cs typeface="Arial"/>
+                <a:sym typeface="Arial"/>
+              </a:rPr>
+              <a:t>Tributación</a:t>
+            </a:r>
+          </a:p>
+        </p:txBody>
+      </p:sp>
+      <p:sp>
+        <p:nvSpPr>
+          <p:cNvPr id="62" name=""/>
+          <p:cNvSpPr>
+            <a:spLocks noGrp="1"/>
+          </p:cNvSpPr>
+          <p:nvPr>
+            </p:nvPr>
+        </p:nvSpPr>
+        <p:spPr>
+          <a:xfrm>
+            <a:off x="7987284" y="5073091"/>
+            <a:ext cx="201168" cy="21946"/>
+          </a:xfrm>
+          <a:prstGeom prst="rect">
+            <a:avLst/>
+          </a:prstGeom>
+          <a:solidFill>
+            <a:srgbClr val="C9CED8">
+              <a:alpha val="100000"/>
+            </a:srgbClr>
+          </a:solidFill>
+          <a:ln w="3175" cap="rnd" cmpd="sng">
+            <a:solidFill>
+              <a:srgbClr val="C9CED8">
+                <a:alpha val="100000"/>
+              </a:srgbClr>
+            </a:solidFill>
+            <a:prstDash val="solid"/>
+            <a:round/>
+            <a:headEnd type="none" w="med" len="med"/>
+            <a:tailEnd type="none" w="med" len="med"/>
+          </a:ln>
+        </p:spPr>
+        <p:txBody>
+          <a:bodyPr/>
+          <a:lstStyle/>
+          <a:p>
+            <a:r>
+              <a:rPr/>
+              <a:t/>
+            </a:r>
+          </a:p>
+        </p:txBody>
+      </p:sp>
+      <p:sp>
+        <p:nvSpPr>
+          <p:cNvPr id="63" name=""/>
+          <p:cNvSpPr>
+            <a:spLocks noGrp="1"/>
+          </p:cNvSpPr>
+          <p:nvPr>
+            </p:nvPr>
+        </p:nvSpPr>
+        <p:spPr>
+          <a:xfrm>
+            <a:off x="7877556" y="4974336"/>
+            <a:ext cx="219456" cy="219456"/>
+          </a:xfrm>
+          <a:prstGeom prst="ellipse">
+            <a:avLst/>
+          </a:prstGeom>
+          <a:solidFill>
+            <a:srgbClr val="0B4F8C">
+              <a:alpha val="100000"/>
+            </a:srgbClr>
+          </a:solidFill>
+          <a:ln w="12700" cap="rnd" cmpd="sng">
+            <a:solidFill>
+              <a:srgbClr val="FFFFFF">
+                <a:alpha val="100000"/>
+              </a:srgbClr>
+            </a:solidFill>
+            <a:prstDash val="solid"/>
+            <a:round/>
+            <a:headEnd type="none" w="med" len="med"/>
+            <a:tailEnd type="none" w="med" len="med"/>
+          </a:ln>
+        </p:spPr>
+        <p:txBody>
+          <a:bodyPr/>
+          <a:lstStyle/>
+          <a:p>
+            <a:r>
+              <a:rPr/>
+              <a:t/>
+            </a:r>
+          </a:p>
+        </p:txBody>
+      </p:sp>
+      <p:sp>
+        <p:nvSpPr>
+          <p:cNvPr id="64" name=""/>
+          <p:cNvSpPr>
+            <a:spLocks noGrp="1"/>
+          </p:cNvSpPr>
+          <p:nvPr>
+            </p:nvPr>
+        </p:nvSpPr>
+        <p:spPr>
+          <a:xfrm>
+            <a:off x="7237476" y="4946904"/>
+            <a:ext cx="640080" cy="274320"/>
+          </a:xfrm>
+          <a:prstGeom prst="rect">
+            <a:avLst/>
+          </a:prstGeom>
+        </p:spPr>
+        <p:txBody>
+          <a:bodyPr/>
+          <a:lstStyle/>
+          <a:p>
+            <a:pPr algn="r" marL="0" marR="0">
+              <a:lnSpc>
+                <a:spcPct val="100000"/>
+              </a:lnSpc>
+              <a:spcBef>
+                <a:spcPts val="0"/>
+              </a:spcBef>
+              <a:spcAft>
+                <a:spcPts val="0"/>
+              </a:spcAft>
+              <a:buNone/>
+            </a:pPr>
+            <a:r>
+              <a:rPr cap="none" sz="1200" i="0" b="1" u="none" strike="noStrike">
+                <a:solidFill>
+                  <a:srgbClr val="081F5C">
+                    <a:alpha val="100000"/>
+                  </a:srgbClr>
+                </a:solidFill>
+                <a:latin typeface="Arial"/>
+                <a:ea typeface="Arial"/>
+                <a:cs typeface="Arial"/>
+                <a:sym typeface="Arial"/>
+              </a:rPr>
+              <a:t>94%</a:t>
+            </a:r>
+          </a:p>
+        </p:txBody>
+      </p:sp>
+      <p:sp>
+        <p:nvSpPr>
+          <p:cNvPr id="65" name=""/>
+          <p:cNvSpPr>
+            <a:spLocks noGrp="1"/>
+          </p:cNvSpPr>
+          <p:nvPr>
+            </p:nvPr>
+        </p:nvSpPr>
+        <p:spPr>
+          <a:xfrm>
+            <a:off x="8078724" y="4974336"/>
+            <a:ext cx="219456" cy="219456"/>
+          </a:xfrm>
+          <a:prstGeom prst="ellipse">
+            <a:avLst/>
+          </a:prstGeom>
+          <a:solidFill>
+            <a:srgbClr val="2A9D8F">
+              <a:alpha val="100000"/>
+            </a:srgbClr>
+          </a:solidFill>
+          <a:ln w="12700" cap="rnd" cmpd="sng">
+            <a:solidFill>
+              <a:srgbClr val="FFFFFF">
+                <a:alpha val="100000"/>
+              </a:srgbClr>
+            </a:solidFill>
+            <a:prstDash val="solid"/>
+            <a:round/>
+            <a:headEnd type="none" w="med" len="med"/>
+            <a:tailEnd type="none" w="med" len="med"/>
+          </a:ln>
+        </p:spPr>
+        <p:txBody>
+          <a:bodyPr/>
+          <a:lstStyle/>
+          <a:p>
+            <a:r>
+              <a:rPr/>
+              <a:t/>
+            </a:r>
+          </a:p>
+        </p:txBody>
+      </p:sp>
+      <p:sp>
+        <p:nvSpPr>
+          <p:cNvPr id="66" name=""/>
+          <p:cNvSpPr>
+            <a:spLocks noGrp="1"/>
+          </p:cNvSpPr>
+          <p:nvPr>
+            </p:nvPr>
+        </p:nvSpPr>
+        <p:spPr>
+          <a:xfrm>
+            <a:off x="8298180" y="4946904"/>
+            <a:ext cx="640080" cy="274320"/>
+          </a:xfrm>
+          <a:prstGeom prst="rect">
+            <a:avLst/>
+          </a:prstGeom>
+        </p:spPr>
+        <p:txBody>
+          <a:bodyPr/>
+          <a:lstStyle/>
+          <a:p>
+            <a:pPr algn="l" marL="0" marR="0">
+              <a:lnSpc>
+                <a:spcPct val="100000"/>
+              </a:lnSpc>
+              <a:spcBef>
+                <a:spcPts val="0"/>
+              </a:spcBef>
+              <a:spcAft>
+                <a:spcPts val="0"/>
+              </a:spcAft>
+              <a:buNone/>
+            </a:pPr>
+            <a:r>
+              <a:rPr cap="none" sz="1200" i="0" b="1" u="none" strike="noStrike">
+                <a:solidFill>
+                  <a:srgbClr val="081F5C">
+                    <a:alpha val="100000"/>
+                  </a:srgbClr>
+                </a:solidFill>
+                <a:latin typeface="Arial"/>
+                <a:ea typeface="Arial"/>
+                <a:cs typeface="Arial"/>
+                <a:sym typeface="Arial"/>
+              </a:rPr>
+              <a:t>96%</a:t>
+            </a:r>
+          </a:p>
+        </p:txBody>
+      </p:sp>
+      <p:sp>
+        <p:nvSpPr>
+          <p:cNvPr id="67" name=""/>
+          <p:cNvSpPr>
+            <a:spLocks noGrp="1"/>
+          </p:cNvSpPr>
+          <p:nvPr>
+            </p:nvPr>
+        </p:nvSpPr>
+        <p:spPr>
+          <a:xfrm>
+            <a:off x="9368028" y="4946904"/>
+            <a:ext cx="2535631" cy="274320"/>
+          </a:xfrm>
+          <a:prstGeom prst="rect">
+            <a:avLst/>
+          </a:prstGeom>
+        </p:spPr>
+        <p:txBody>
+          <a:bodyPr/>
+          <a:lstStyle/>
+          <a:p>
+            <a:pPr algn="l" marL="0" marR="0">
+              <a:lnSpc>
+                <a:spcPct val="100000"/>
+              </a:lnSpc>
+              <a:spcBef>
+                <a:spcPts val="0"/>
+              </a:spcBef>
+              <a:spcAft>
+                <a:spcPts val="0"/>
+              </a:spcAft>
+              <a:buNone/>
+            </a:pPr>
+            <a:r>
+              <a:rPr cap="none" sz="1300" i="0" b="0" u="none" strike="noStrike">
+                <a:solidFill>
+                  <a:srgbClr val="5A6480">
+                    <a:alpha val="100000"/>
+                  </a:srgbClr>
+                </a:solidFill>
+                <a:latin typeface="Arial"/>
+                <a:ea typeface="Arial"/>
+                <a:cs typeface="Arial"/>
+                <a:sym typeface="Arial"/>
+              </a:rPr>
+              <a:t>Sin diferencia clara</a:t>
+            </a:r>
+          </a:p>
+        </p:txBody>
+      </p:sp>
+      <p:sp>
+        <p:nvSpPr>
+          <p:cNvPr id="68" name=""/>
+          <p:cNvSpPr>
+            <a:spLocks noGrp="1"/>
+          </p:cNvSpPr>
+          <p:nvPr>
+            </p:nvPr>
+        </p:nvSpPr>
+        <p:spPr>
+          <a:xfrm>
+            <a:off x="452628" y="5669280"/>
+            <a:ext cx="11451031" cy="320040"/>
+          </a:xfrm>
+          <a:prstGeom prst="rect">
+            <a:avLst/>
+          </a:prstGeom>
+        </p:spPr>
+        <p:txBody>
+          <a:bodyPr/>
+          <a:lstStyle/>
+          <a:p>
+            <a:pPr algn="l" marL="0" marR="0">
+              <a:lnSpc>
+                <a:spcPct val="100000"/>
+              </a:lnSpc>
+              <a:spcBef>
+                <a:spcPts val="0"/>
+              </a:spcBef>
+              <a:spcAft>
+                <a:spcPts val="0"/>
+              </a:spcAft>
+              <a:buNone/>
+            </a:pPr>
+            <a:r>
+              <a:rPr cap="none" sz="1250" i="0" b="0" u="none" strike="noStrike">
+                <a:solidFill>
+                  <a:srgbClr val="081F5C">
+                    <a:alpha val="100000"/>
+                  </a:srgbClr>
+                </a:solidFill>
+                <a:latin typeface="Arial"/>
+                <a:ea typeface="Arial"/>
+                <a:cs typeface="Arial"/>
+                <a:sym typeface="Arial"/>
+              </a:rPr>
+              <a:t>«Diferencia clara»: es muy poco probable que la distancia entre los dos públicos se deba al azar de quiénes respondieron.</a:t>
+            </a:r>
+          </a:p>
+        </p:txBody>
+      </p:sp>
+      <p:sp>
+        <p:nvSpPr>
+          <p:cNvPr id="69" name=""/>
+          <p:cNvSpPr>
+            <a:spLocks noGrp="1"/>
+          </p:cNvSpPr>
+          <p:nvPr>
+            </p:nvPr>
+        </p:nvSpPr>
+        <p:spPr>
+          <a:xfrm>
+            <a:off x="452628" y="6291072"/>
+            <a:ext cx="9601200" cy="365760"/>
+          </a:xfrm>
+          <a:prstGeom prst="rect">
+            <a:avLst/>
+          </a:prstGeom>
+        </p:spPr>
+        <p:txBody>
+          <a:bodyPr/>
+          <a:lstStyle/>
+          <a:p>
+            <a:pPr algn="l" marL="0" marR="0">
+              <a:lnSpc>
+                <a:spcPct val="100000"/>
+              </a:lnSpc>
+              <a:spcBef>
+                <a:spcPts val="0"/>
+              </a:spcBef>
+              <a:spcAft>
+                <a:spcPts val="0"/>
+              </a:spcAft>
+              <a:buNone/>
+            </a:pPr>
+            <a:r>
+              <a:rPr cap="none" sz="1000" i="0" b="1" u="none" strike="noStrike">
+                <a:solidFill>
+                  <a:srgbClr val="081F5C">
+                    <a:alpha val="100000"/>
+                  </a:srgbClr>
+                </a:solidFill>
+                <a:latin typeface="Arial"/>
+                <a:ea typeface="Arial"/>
+                <a:cs typeface="Arial"/>
+                <a:sym typeface="Arial"/>
+              </a:rPr>
+              <a:t>Top Two Box o «Sí». Base: 52 docentes y 172 estudiantes (Auditoría y Tributación: 51 y 109). La versión técnica muestra el intervalo y la prueba</a:t>
+            </a:r>
+          </a:p>
+        </p:txBody>
+      </p:sp>
+      <p:sp>
+        <p:nvSpPr>
+          <p:cNvPr id="70" name=""/>
           <p:cNvSpPr>
             <a:spLocks noGrp="1"/>
           </p:cNvSpPr>
@@ -54962,6 +57270,2580 @@
 </p:sld>
 </file>
 
+<file path=ppt/slides/slide20.xml><?xml version="1.0" encoding="utf-8"?>
+<p:sld xmlns:a="http://schemas.openxmlformats.org/drawingml/2006/main" xmlns:r="http://schemas.openxmlformats.org/officeDocument/2006/relationships" xmlns:p="http://schemas.openxmlformats.org/presentationml/2006/main">
+  <p:cSld>
+    <p:spTree>
+      <p:nvGrpSpPr>
+        <p:cNvPr id="1" name=""/>
+        <p:cNvGrpSpPr/>
+        <p:nvPr/>
+      </p:nvGrpSpPr>
+      <p:grpSpPr>
+        <a:xfrm>
+          <a:off x="0" y="0"/>
+          <a:ext cx="0" cy="0"/>
+          <a:chOff x="0" y="0"/>
+          <a:chExt cx="0" cy="0"/>
+        </a:xfrm>
+      </p:grpSpPr>
+      <p:sp>
+        <p:nvSpPr>
+          <p:cNvPr id="2" name=""/>
+          <p:cNvSpPr>
+            <a:spLocks noGrp="1"/>
+          </p:cNvSpPr>
+          <p:nvPr>
+            </p:nvPr>
+        </p:nvSpPr>
+        <p:spPr>
+          <a:xfrm>
+            <a:off x="288036" y="214884"/>
+            <a:ext cx="45720" cy="658368"/>
+          </a:xfrm>
+          <a:prstGeom prst="rect">
+            <a:avLst/>
+          </a:prstGeom>
+          <a:solidFill>
+            <a:srgbClr val="081F5C">
+              <a:alpha val="100000"/>
+            </a:srgbClr>
+          </a:solidFill>
+          <a:ln w="3175" cap="rnd" cmpd="sng">
+            <a:solidFill>
+              <a:srgbClr val="081F5C">
+                <a:alpha val="100000"/>
+              </a:srgbClr>
+            </a:solidFill>
+            <a:prstDash val="solid"/>
+            <a:round/>
+            <a:headEnd type="none" w="med" len="med"/>
+            <a:tailEnd type="none" w="med" len="med"/>
+          </a:ln>
+        </p:spPr>
+        <p:txBody>
+          <a:bodyPr/>
+          <a:lstStyle/>
+          <a:p>
+            <a:r>
+              <a:rPr/>
+              <a:t/>
+            </a:r>
+          </a:p>
+        </p:txBody>
+      </p:sp>
+      <p:sp>
+        <p:nvSpPr>
+          <p:cNvPr id="3" name=""/>
+          <p:cNvSpPr>
+            <a:spLocks noGrp="1"/>
+          </p:cNvSpPr>
+          <p:nvPr>
+            </p:nvPr>
+        </p:nvSpPr>
+        <p:spPr>
+          <a:xfrm>
+            <a:off x="452628" y="169164"/>
+            <a:ext cx="8229600" cy="237744"/>
+          </a:xfrm>
+          <a:prstGeom prst="rect">
+            <a:avLst/>
+          </a:prstGeom>
+        </p:spPr>
+        <p:txBody>
+          <a:bodyPr/>
+          <a:lstStyle/>
+          <a:p>
+            <a:pPr algn="l" marL="0" marR="0">
+              <a:lnSpc>
+                <a:spcPct val="100000"/>
+              </a:lnSpc>
+              <a:spcBef>
+                <a:spcPts val="0"/>
+              </a:spcBef>
+              <a:spcAft>
+                <a:spcPts val="0"/>
+              </a:spcAft>
+              <a:buNone/>
+            </a:pPr>
+            <a:r>
+              <a:rPr cap="none" sz="1000" i="0" b="1" u="none" strike="noStrike">
+                <a:solidFill>
+                  <a:srgbClr val="5A6480">
+                    <a:alpha val="100000"/>
+                  </a:srgbClr>
+                </a:solidFill>
+                <a:latin typeface="Arial"/>
+                <a:ea typeface="Arial"/>
+                <a:cs typeface="Arial"/>
+                <a:sym typeface="Arial"/>
+              </a:rPr>
+              <a:t>PROPUESTA 5: VERSIÓN PARA PÚBLICO GENERAL</a:t>
+            </a:r>
+          </a:p>
+        </p:txBody>
+      </p:sp>
+      <p:sp>
+        <p:nvSpPr>
+          <p:cNvPr id="4" name="Título"/>
+          <p:cNvSpPr>
+            <a:spLocks noGrp="1"/>
+          </p:cNvSpPr>
+          <p:nvPr>
+            <p:ph type="title"/>
+          </p:nvPr>
+        </p:nvSpPr>
+        <p:spPr>
+          <a:xfrm>
+            <a:off x="452628" y="379476"/>
+            <a:ext cx="9509760" cy="457200"/>
+          </a:xfrm>
+        </p:spPr>
+        <p:txBody>
+          <a:bodyPr anchor="t">
+            <a:noAutofit/>
+          </a:bodyPr>
+          <a:lstStyle/>
+          <a:p>
+            <a:pPr algn="l" marL="0" marR="0">
+              <a:lnSpc>
+                <a:spcPct val="100000"/>
+              </a:lnSpc>
+              <a:spcBef>
+                <a:spcPts val="0"/>
+              </a:spcBef>
+              <a:spcAft>
+                <a:spcPts val="0"/>
+              </a:spcAft>
+              <a:buNone/>
+            </a:pPr>
+            <a:r>
+              <a:rPr cap="none" sz="2400" i="0" b="1" u="none" strike="noStrike">
+                <a:solidFill>
+                  <a:srgbClr val="CA5651">
+                    <a:alpha val="100000"/>
+                  </a:srgbClr>
+                </a:solidFill>
+                <a:latin typeface="Arial"/>
+                <a:ea typeface="Arial"/>
+                <a:cs typeface="Arial"/>
+                <a:sym typeface="Arial"/>
+              </a:rPr>
+              <a:t>Los docentes son quienes más conocen la misión</a:t>
+            </a:r>
+          </a:p>
+        </p:txBody>
+      </p:sp>
+      <p:sp>
+        <p:nvSpPr>
+          <p:cNvPr id="5" name=""/>
+          <p:cNvSpPr>
+            <a:spLocks noGrp="1"/>
+          </p:cNvSpPr>
+          <p:nvPr>
+            </p:nvPr>
+        </p:nvSpPr>
+        <p:spPr>
+          <a:xfrm>
+            <a:off x="361188" y="1892808"/>
+            <a:ext cx="2331720" cy="292608"/>
+          </a:xfrm>
+          <a:prstGeom prst="rect">
+            <a:avLst/>
+          </a:prstGeom>
+        </p:spPr>
+        <p:txBody>
+          <a:bodyPr/>
+          <a:lstStyle/>
+          <a:p>
+            <a:pPr algn="r" marL="0" marR="0">
+              <a:lnSpc>
+                <a:spcPct val="100000"/>
+              </a:lnSpc>
+              <a:spcBef>
+                <a:spcPts val="0"/>
+              </a:spcBef>
+              <a:spcAft>
+                <a:spcPts val="0"/>
+              </a:spcAft>
+              <a:buNone/>
+            </a:pPr>
+            <a:r>
+              <a:rPr cap="none" sz="1400" i="0" b="1" u="none" strike="noStrike">
+                <a:solidFill>
+                  <a:srgbClr val="081F5C">
+                    <a:alpha val="100000"/>
+                  </a:srgbClr>
+                </a:solidFill>
+                <a:latin typeface="Arial"/>
+                <a:ea typeface="Arial"/>
+                <a:cs typeface="Arial"/>
+                <a:sym typeface="Arial"/>
+              </a:rPr>
+              <a:t>Docentes</a:t>
+            </a:r>
+          </a:p>
+        </p:txBody>
+      </p:sp>
+      <p:sp>
+        <p:nvSpPr>
+          <p:cNvPr id="6" name=""/>
+          <p:cNvSpPr>
+            <a:spLocks noGrp="1"/>
+          </p:cNvSpPr>
+          <p:nvPr>
+            </p:nvPr>
+        </p:nvSpPr>
+        <p:spPr>
+          <a:xfrm>
+            <a:off x="2830068" y="1828800"/>
+            <a:ext cx="3945988" cy="420624"/>
+          </a:xfrm>
+          <a:prstGeom prst="rect">
+            <a:avLst/>
+          </a:prstGeom>
+          <a:solidFill>
+            <a:srgbClr val="081F5C">
+              <a:alpha val="100000"/>
+            </a:srgbClr>
+          </a:solidFill>
+          <a:ln w="3175" cap="rnd" cmpd="sng">
+            <a:solidFill>
+              <a:srgbClr val="081F5C">
+                <a:alpha val="100000"/>
+              </a:srgbClr>
+            </a:solidFill>
+            <a:prstDash val="solid"/>
+            <a:round/>
+            <a:headEnd type="none" w="med" len="med"/>
+            <a:tailEnd type="none" w="med" len="med"/>
+          </a:ln>
+        </p:spPr>
+        <p:txBody>
+          <a:bodyPr/>
+          <a:lstStyle/>
+          <a:p>
+            <a:r>
+              <a:rPr/>
+              <a:t/>
+            </a:r>
+          </a:p>
+        </p:txBody>
+      </p:sp>
+      <p:sp>
+        <p:nvSpPr>
+          <p:cNvPr id="7" name=""/>
+          <p:cNvSpPr>
+            <a:spLocks noGrp="1"/>
+          </p:cNvSpPr>
+          <p:nvPr>
+            </p:nvPr>
+        </p:nvSpPr>
+        <p:spPr>
+          <a:xfrm>
+            <a:off x="6867496" y="1883664"/>
+            <a:ext cx="822960" cy="310896"/>
+          </a:xfrm>
+          <a:prstGeom prst="rect">
+            <a:avLst/>
+          </a:prstGeom>
+        </p:spPr>
+        <p:txBody>
+          <a:bodyPr/>
+          <a:lstStyle/>
+          <a:p>
+            <a:pPr algn="l" marL="0" marR="0">
+              <a:lnSpc>
+                <a:spcPct val="100000"/>
+              </a:lnSpc>
+              <a:spcBef>
+                <a:spcPts val="0"/>
+              </a:spcBef>
+              <a:spcAft>
+                <a:spcPts val="0"/>
+              </a:spcAft>
+              <a:buNone/>
+            </a:pPr>
+            <a:r>
+              <a:rPr cap="none" sz="1500" i="0" b="1" u="none" strike="noStrike">
+                <a:solidFill>
+                  <a:srgbClr val="081F5C">
+                    <a:alpha val="100000"/>
+                  </a:srgbClr>
+                </a:solidFill>
+                <a:latin typeface="Arial"/>
+                <a:ea typeface="Arial"/>
+                <a:cs typeface="Arial"/>
+                <a:sym typeface="Arial"/>
+              </a:rPr>
+              <a:t>98%</a:t>
+            </a:r>
+          </a:p>
+        </p:txBody>
+      </p:sp>
+      <p:sp>
+        <p:nvSpPr>
+          <p:cNvPr id="8" name=""/>
+          <p:cNvSpPr>
+            <a:spLocks noGrp="1"/>
+          </p:cNvSpPr>
+          <p:nvPr>
+            </p:nvPr>
+        </p:nvSpPr>
+        <p:spPr>
+          <a:xfrm>
+            <a:off x="361188" y="2670048"/>
+            <a:ext cx="2331720" cy="292608"/>
+          </a:xfrm>
+          <a:prstGeom prst="rect">
+            <a:avLst/>
+          </a:prstGeom>
+        </p:spPr>
+        <p:txBody>
+          <a:bodyPr/>
+          <a:lstStyle/>
+          <a:p>
+            <a:pPr algn="r" marL="0" marR="0">
+              <a:lnSpc>
+                <a:spcPct val="100000"/>
+              </a:lnSpc>
+              <a:spcBef>
+                <a:spcPts val="0"/>
+              </a:spcBef>
+              <a:spcAft>
+                <a:spcPts val="0"/>
+              </a:spcAft>
+              <a:buNone/>
+            </a:pPr>
+            <a:r>
+              <a:rPr cap="none" sz="1400" i="0" b="0" u="none" strike="noStrike">
+                <a:solidFill>
+                  <a:srgbClr val="081F5C">
+                    <a:alpha val="100000"/>
+                  </a:srgbClr>
+                </a:solidFill>
+                <a:latin typeface="Arial"/>
+                <a:ea typeface="Arial"/>
+                <a:cs typeface="Arial"/>
+                <a:sym typeface="Arial"/>
+              </a:rPr>
+              <a:t>Administrativos</a:t>
+            </a:r>
+          </a:p>
+        </p:txBody>
+      </p:sp>
+      <p:sp>
+        <p:nvSpPr>
+          <p:cNvPr id="9" name=""/>
+          <p:cNvSpPr>
+            <a:spLocks noGrp="1"/>
+          </p:cNvSpPr>
+          <p:nvPr>
+            </p:nvPr>
+        </p:nvSpPr>
+        <p:spPr>
+          <a:xfrm>
+            <a:off x="2830068" y="2606040"/>
+            <a:ext cx="3755136" cy="420624"/>
+          </a:xfrm>
+          <a:prstGeom prst="rect">
+            <a:avLst/>
+          </a:prstGeom>
+          <a:ln w="15875" cap="rnd" cmpd="sng">
+            <a:solidFill>
+              <a:srgbClr val="8E9DBD">
+                <a:alpha val="100000"/>
+              </a:srgbClr>
+            </a:solidFill>
+            <a:prstDash val="dash"/>
+            <a:round/>
+            <a:headEnd type="none" w="med" len="med"/>
+            <a:tailEnd type="none" w="med" len="med"/>
+          </a:ln>
+        </p:spPr>
+        <p:txBody>
+          <a:bodyPr/>
+          <a:lstStyle/>
+          <a:p>
+            <a:r>
+              <a:rPr/>
+              <a:t/>
+            </a:r>
+          </a:p>
+        </p:txBody>
+      </p:sp>
+      <p:sp>
+        <p:nvSpPr>
+          <p:cNvPr id="10" name=""/>
+          <p:cNvSpPr>
+            <a:spLocks noGrp="1"/>
+          </p:cNvSpPr>
+          <p:nvPr>
+            </p:nvPr>
+        </p:nvSpPr>
+        <p:spPr>
+          <a:xfrm>
+            <a:off x="6676644" y="2660904"/>
+            <a:ext cx="822960" cy="310896"/>
+          </a:xfrm>
+          <a:prstGeom prst="rect">
+            <a:avLst/>
+          </a:prstGeom>
+        </p:spPr>
+        <p:txBody>
+          <a:bodyPr/>
+          <a:lstStyle/>
+          <a:p>
+            <a:pPr algn="l" marL="0" marR="0">
+              <a:lnSpc>
+                <a:spcPct val="100000"/>
+              </a:lnSpc>
+              <a:spcBef>
+                <a:spcPts val="0"/>
+              </a:spcBef>
+              <a:spcAft>
+                <a:spcPts val="0"/>
+              </a:spcAft>
+              <a:buNone/>
+            </a:pPr>
+            <a:r>
+              <a:rPr cap="none" sz="1500" i="0" b="1" u="none" strike="noStrike">
+                <a:solidFill>
+                  <a:srgbClr val="081F5C">
+                    <a:alpha val="100000"/>
+                  </a:srgbClr>
+                </a:solidFill>
+                <a:latin typeface="Arial"/>
+                <a:ea typeface="Arial"/>
+                <a:cs typeface="Arial"/>
+                <a:sym typeface="Arial"/>
+              </a:rPr>
+              <a:t>93%</a:t>
+            </a:r>
+          </a:p>
+        </p:txBody>
+      </p:sp>
+      <p:sp>
+        <p:nvSpPr>
+          <p:cNvPr id="11" name=""/>
+          <p:cNvSpPr>
+            <a:spLocks noGrp="1"/>
+          </p:cNvSpPr>
+          <p:nvPr>
+            </p:nvPr>
+        </p:nvSpPr>
+        <p:spPr>
+          <a:xfrm>
+            <a:off x="361188" y="3447288"/>
+            <a:ext cx="2331720" cy="292608"/>
+          </a:xfrm>
+          <a:prstGeom prst="rect">
+            <a:avLst/>
+          </a:prstGeom>
+        </p:spPr>
+        <p:txBody>
+          <a:bodyPr/>
+          <a:lstStyle/>
+          <a:p>
+            <a:pPr algn="r" marL="0" marR="0">
+              <a:lnSpc>
+                <a:spcPct val="100000"/>
+              </a:lnSpc>
+              <a:spcBef>
+                <a:spcPts val="0"/>
+              </a:spcBef>
+              <a:spcAft>
+                <a:spcPts val="0"/>
+              </a:spcAft>
+              <a:buNone/>
+            </a:pPr>
+            <a:r>
+              <a:rPr cap="none" sz="1400" i="0" b="0" u="none" strike="noStrike">
+                <a:solidFill>
+                  <a:srgbClr val="081F5C">
+                    <a:alpha val="100000"/>
+                  </a:srgbClr>
+                </a:solidFill>
+                <a:latin typeface="Arial"/>
+                <a:ea typeface="Arial"/>
+                <a:cs typeface="Arial"/>
+                <a:sym typeface="Arial"/>
+              </a:rPr>
+              <a:t>Egresados</a:t>
+            </a:r>
+          </a:p>
+        </p:txBody>
+      </p:sp>
+      <p:sp>
+        <p:nvSpPr>
+          <p:cNvPr id="12" name=""/>
+          <p:cNvSpPr>
+            <a:spLocks noGrp="1"/>
+          </p:cNvSpPr>
+          <p:nvPr>
+            </p:nvPr>
+        </p:nvSpPr>
+        <p:spPr>
+          <a:xfrm>
+            <a:off x="2830068" y="3383280"/>
+            <a:ext cx="3119234" cy="420624"/>
+          </a:xfrm>
+          <a:prstGeom prst="rect">
+            <a:avLst/>
+          </a:prstGeom>
+          <a:solidFill>
+            <a:srgbClr val="8E9DBD">
+              <a:alpha val="100000"/>
+            </a:srgbClr>
+          </a:solidFill>
+          <a:ln w="3175" cap="rnd" cmpd="sng">
+            <a:solidFill>
+              <a:srgbClr val="8E9DBD">
+                <a:alpha val="100000"/>
+              </a:srgbClr>
+            </a:solidFill>
+            <a:prstDash val="solid"/>
+            <a:round/>
+            <a:headEnd type="none" w="med" len="med"/>
+            <a:tailEnd type="none" w="med" len="med"/>
+          </a:ln>
+        </p:spPr>
+        <p:txBody>
+          <a:bodyPr/>
+          <a:lstStyle/>
+          <a:p>
+            <a:r>
+              <a:rPr/>
+              <a:t/>
+            </a:r>
+          </a:p>
+        </p:txBody>
+      </p:sp>
+      <p:sp>
+        <p:nvSpPr>
+          <p:cNvPr id="13" name=""/>
+          <p:cNvSpPr>
+            <a:spLocks noGrp="1"/>
+          </p:cNvSpPr>
+          <p:nvPr>
+            </p:nvPr>
+        </p:nvSpPr>
+        <p:spPr>
+          <a:xfrm>
+            <a:off x="6040742" y="3438144"/>
+            <a:ext cx="822960" cy="310896"/>
+          </a:xfrm>
+          <a:prstGeom prst="rect">
+            <a:avLst/>
+          </a:prstGeom>
+        </p:spPr>
+        <p:txBody>
+          <a:bodyPr/>
+          <a:lstStyle/>
+          <a:p>
+            <a:pPr algn="l" marL="0" marR="0">
+              <a:lnSpc>
+                <a:spcPct val="100000"/>
+              </a:lnSpc>
+              <a:spcBef>
+                <a:spcPts val="0"/>
+              </a:spcBef>
+              <a:spcAft>
+                <a:spcPts val="0"/>
+              </a:spcAft>
+              <a:buNone/>
+            </a:pPr>
+            <a:r>
+              <a:rPr cap="none" sz="1500" i="0" b="1" u="none" strike="noStrike">
+                <a:solidFill>
+                  <a:srgbClr val="081F5C">
+                    <a:alpha val="100000"/>
+                  </a:srgbClr>
+                </a:solidFill>
+                <a:latin typeface="Arial"/>
+                <a:ea typeface="Arial"/>
+                <a:cs typeface="Arial"/>
+                <a:sym typeface="Arial"/>
+              </a:rPr>
+              <a:t>78%</a:t>
+            </a:r>
+          </a:p>
+        </p:txBody>
+      </p:sp>
+      <p:sp>
+        <p:nvSpPr>
+          <p:cNvPr id="14" name=""/>
+          <p:cNvSpPr>
+            <a:spLocks noGrp="1"/>
+          </p:cNvSpPr>
+          <p:nvPr>
+            </p:nvPr>
+        </p:nvSpPr>
+        <p:spPr>
+          <a:xfrm>
+            <a:off x="361188" y="4224528"/>
+            <a:ext cx="2331720" cy="292608"/>
+          </a:xfrm>
+          <a:prstGeom prst="rect">
+            <a:avLst/>
+          </a:prstGeom>
+        </p:spPr>
+        <p:txBody>
+          <a:bodyPr/>
+          <a:lstStyle/>
+          <a:p>
+            <a:pPr algn="r" marL="0" marR="0">
+              <a:lnSpc>
+                <a:spcPct val="100000"/>
+              </a:lnSpc>
+              <a:spcBef>
+                <a:spcPts val="0"/>
+              </a:spcBef>
+              <a:spcAft>
+                <a:spcPts val="0"/>
+              </a:spcAft>
+              <a:buNone/>
+            </a:pPr>
+            <a:r>
+              <a:rPr cap="none" sz="1400" i="0" b="0" u="none" strike="noStrike">
+                <a:solidFill>
+                  <a:srgbClr val="081F5C">
+                    <a:alpha val="100000"/>
+                  </a:srgbClr>
+                </a:solidFill>
+                <a:latin typeface="Arial"/>
+                <a:ea typeface="Arial"/>
+                <a:cs typeface="Arial"/>
+                <a:sym typeface="Arial"/>
+              </a:rPr>
+              <a:t>Estudiantes</a:t>
+            </a:r>
+          </a:p>
+        </p:txBody>
+      </p:sp>
+      <p:sp>
+        <p:nvSpPr>
+          <p:cNvPr id="15" name=""/>
+          <p:cNvSpPr>
+            <a:spLocks noGrp="1"/>
+          </p:cNvSpPr>
+          <p:nvPr>
+            </p:nvPr>
+        </p:nvSpPr>
+        <p:spPr>
+          <a:xfrm>
+            <a:off x="2830068" y="4160520"/>
+            <a:ext cx="3111087" cy="420624"/>
+          </a:xfrm>
+          <a:prstGeom prst="rect">
+            <a:avLst/>
+          </a:prstGeom>
+          <a:solidFill>
+            <a:srgbClr val="8E9DBD">
+              <a:alpha val="100000"/>
+            </a:srgbClr>
+          </a:solidFill>
+          <a:ln w="3175" cap="rnd" cmpd="sng">
+            <a:solidFill>
+              <a:srgbClr val="8E9DBD">
+                <a:alpha val="100000"/>
+              </a:srgbClr>
+            </a:solidFill>
+            <a:prstDash val="solid"/>
+            <a:round/>
+            <a:headEnd type="none" w="med" len="med"/>
+            <a:tailEnd type="none" w="med" len="med"/>
+          </a:ln>
+        </p:spPr>
+        <p:txBody>
+          <a:bodyPr/>
+          <a:lstStyle/>
+          <a:p>
+            <a:r>
+              <a:rPr/>
+              <a:t/>
+            </a:r>
+          </a:p>
+        </p:txBody>
+      </p:sp>
+      <p:sp>
+        <p:nvSpPr>
+          <p:cNvPr id="16" name=""/>
+          <p:cNvSpPr>
+            <a:spLocks noGrp="1"/>
+          </p:cNvSpPr>
+          <p:nvPr>
+            </p:nvPr>
+        </p:nvSpPr>
+        <p:spPr>
+          <a:xfrm>
+            <a:off x="6032595" y="4215384"/>
+            <a:ext cx="822960" cy="310896"/>
+          </a:xfrm>
+          <a:prstGeom prst="rect">
+            <a:avLst/>
+          </a:prstGeom>
+        </p:spPr>
+        <p:txBody>
+          <a:bodyPr/>
+          <a:lstStyle/>
+          <a:p>
+            <a:pPr algn="l" marL="0" marR="0">
+              <a:lnSpc>
+                <a:spcPct val="100000"/>
+              </a:lnSpc>
+              <a:spcBef>
+                <a:spcPts val="0"/>
+              </a:spcBef>
+              <a:spcAft>
+                <a:spcPts val="0"/>
+              </a:spcAft>
+              <a:buNone/>
+            </a:pPr>
+            <a:r>
+              <a:rPr cap="none" sz="1500" i="0" b="1" u="none" strike="noStrike">
+                <a:solidFill>
+                  <a:srgbClr val="081F5C">
+                    <a:alpha val="100000"/>
+                  </a:srgbClr>
+                </a:solidFill>
+                <a:latin typeface="Arial"/>
+                <a:ea typeface="Arial"/>
+                <a:cs typeface="Arial"/>
+                <a:sym typeface="Arial"/>
+              </a:rPr>
+              <a:t>77%</a:t>
+            </a:r>
+          </a:p>
+        </p:txBody>
+      </p:sp>
+      <p:sp>
+        <p:nvSpPr>
+          <p:cNvPr id="17" name=""/>
+          <p:cNvSpPr>
+            <a:spLocks noGrp="1"/>
+          </p:cNvSpPr>
+          <p:nvPr>
+            </p:nvPr>
+        </p:nvSpPr>
+        <p:spPr>
+          <a:xfrm>
+            <a:off x="6825996" y="3383280"/>
+            <a:ext cx="91440" cy="20117"/>
+          </a:xfrm>
+          <a:prstGeom prst="rect">
+            <a:avLst/>
+          </a:prstGeom>
+          <a:solidFill>
+            <a:srgbClr val="081F5C">
+              <a:alpha val="100000"/>
+            </a:srgbClr>
+          </a:solidFill>
+          <a:ln w="3175" cap="rnd" cmpd="sng">
+            <a:solidFill>
+              <a:srgbClr val="081F5C">
+                <a:alpha val="100000"/>
+              </a:srgbClr>
+            </a:solidFill>
+            <a:prstDash val="solid"/>
+            <a:round/>
+            <a:headEnd type="none" w="med" len="med"/>
+            <a:tailEnd type="none" w="med" len="med"/>
+          </a:ln>
+        </p:spPr>
+        <p:txBody>
+          <a:bodyPr/>
+          <a:lstStyle/>
+          <a:p>
+            <a:r>
+              <a:rPr/>
+              <a:t/>
+            </a:r>
+          </a:p>
+        </p:txBody>
+      </p:sp>
+      <p:sp>
+        <p:nvSpPr>
+          <p:cNvPr id="18" name=""/>
+          <p:cNvSpPr>
+            <a:spLocks noGrp="1"/>
+          </p:cNvSpPr>
+          <p:nvPr>
+            </p:nvPr>
+        </p:nvSpPr>
+        <p:spPr>
+          <a:xfrm>
+            <a:off x="6825996" y="4561027"/>
+            <a:ext cx="91440" cy="20117"/>
+          </a:xfrm>
+          <a:prstGeom prst="rect">
+            <a:avLst/>
+          </a:prstGeom>
+          <a:solidFill>
+            <a:srgbClr val="081F5C">
+              <a:alpha val="100000"/>
+            </a:srgbClr>
+          </a:solidFill>
+          <a:ln w="3175" cap="rnd" cmpd="sng">
+            <a:solidFill>
+              <a:srgbClr val="081F5C">
+                <a:alpha val="100000"/>
+              </a:srgbClr>
+            </a:solidFill>
+            <a:prstDash val="solid"/>
+            <a:round/>
+            <a:headEnd type="none" w="med" len="med"/>
+            <a:tailEnd type="none" w="med" len="med"/>
+          </a:ln>
+        </p:spPr>
+        <p:txBody>
+          <a:bodyPr/>
+          <a:lstStyle/>
+          <a:p>
+            <a:r>
+              <a:rPr/>
+              <a:t/>
+            </a:r>
+          </a:p>
+        </p:txBody>
+      </p:sp>
+      <p:sp>
+        <p:nvSpPr>
+          <p:cNvPr id="19" name=""/>
+          <p:cNvSpPr>
+            <a:spLocks noGrp="1"/>
+          </p:cNvSpPr>
+          <p:nvPr>
+            </p:nvPr>
+        </p:nvSpPr>
+        <p:spPr>
+          <a:xfrm>
+            <a:off x="6897319" y="3383280"/>
+            <a:ext cx="20117" cy="1197864"/>
+          </a:xfrm>
+          <a:prstGeom prst="rect">
+            <a:avLst/>
+          </a:prstGeom>
+          <a:solidFill>
+            <a:srgbClr val="081F5C">
+              <a:alpha val="100000"/>
+            </a:srgbClr>
+          </a:solidFill>
+          <a:ln w="3175" cap="rnd" cmpd="sng">
+            <a:solidFill>
+              <a:srgbClr val="081F5C">
+                <a:alpha val="100000"/>
+              </a:srgbClr>
+            </a:solidFill>
+            <a:prstDash val="solid"/>
+            <a:round/>
+            <a:headEnd type="none" w="med" len="med"/>
+            <a:tailEnd type="none" w="med" len="med"/>
+          </a:ln>
+        </p:spPr>
+        <p:txBody>
+          <a:bodyPr/>
+          <a:lstStyle/>
+          <a:p>
+            <a:r>
+              <a:rPr/>
+              <a:t/>
+            </a:r>
+          </a:p>
+        </p:txBody>
+      </p:sp>
+      <p:sp>
+        <p:nvSpPr>
+          <p:cNvPr id="20" name=""/>
+          <p:cNvSpPr>
+            <a:spLocks noGrp="1"/>
+          </p:cNvSpPr>
+          <p:nvPr>
+            </p:nvPr>
+        </p:nvSpPr>
+        <p:spPr>
+          <a:xfrm>
+            <a:off x="6897319" y="3972154"/>
+            <a:ext cx="202997" cy="20117"/>
+          </a:xfrm>
+          <a:prstGeom prst="rect">
+            <a:avLst/>
+          </a:prstGeom>
+          <a:solidFill>
+            <a:srgbClr val="081F5C">
+              <a:alpha val="100000"/>
+            </a:srgbClr>
+          </a:solidFill>
+          <a:ln w="3175" cap="rnd" cmpd="sng">
+            <a:solidFill>
+              <a:srgbClr val="081F5C">
+                <a:alpha val="100000"/>
+              </a:srgbClr>
+            </a:solidFill>
+            <a:prstDash val="solid"/>
+            <a:round/>
+            <a:headEnd type="none" w="med" len="med"/>
+            <a:tailEnd type="none" w="med" len="med"/>
+          </a:ln>
+        </p:spPr>
+        <p:txBody>
+          <a:bodyPr/>
+          <a:lstStyle/>
+          <a:p>
+            <a:r>
+              <a:rPr/>
+              <a:t/>
+            </a:r>
+          </a:p>
+        </p:txBody>
+      </p:sp>
+      <p:sp>
+        <p:nvSpPr>
+          <p:cNvPr id="21" name=""/>
+          <p:cNvSpPr>
+            <a:spLocks noGrp="1"/>
+          </p:cNvSpPr>
+          <p:nvPr>
+            </p:nvPr>
+        </p:nvSpPr>
+        <p:spPr>
+          <a:xfrm>
+            <a:off x="7146036" y="3707892"/>
+            <a:ext cx="1737360" cy="548640"/>
+          </a:xfrm>
+          <a:prstGeom prst="rect">
+            <a:avLst/>
+          </a:prstGeom>
+        </p:spPr>
+        <p:txBody>
+          <a:bodyPr/>
+          <a:lstStyle/>
+          <a:p>
+            <a:pPr algn="l" marL="0" marR="0">
+              <a:lnSpc>
+                <a:spcPct val="100000"/>
+              </a:lnSpc>
+              <a:spcBef>
+                <a:spcPts val="0"/>
+              </a:spcBef>
+              <a:spcAft>
+                <a:spcPts val="0"/>
+              </a:spcAft>
+              <a:buNone/>
+            </a:pPr>
+            <a:r>
+              <a:rPr cap="none" sz="1200" i="0" b="1" u="none" strike="noStrike">
+                <a:solidFill>
+                  <a:srgbClr val="081F5C">
+                    <a:alpha val="100000"/>
+                  </a:srgbClr>
+                </a:solidFill>
+                <a:latin typeface="Arial"/>
+                <a:ea typeface="Arial"/>
+                <a:cs typeface="Arial"/>
+                <a:sym typeface="Arial"/>
+              </a:rPr>
+              <a:t>Sin diferencia clara entre ellos</a:t>
+            </a:r>
+          </a:p>
+        </p:txBody>
+      </p:sp>
+      <p:sp>
+        <p:nvSpPr>
+          <p:cNvPr id="22" name=""/>
+          <p:cNvSpPr>
+            <a:spLocks noGrp="1"/>
+          </p:cNvSpPr>
+          <p:nvPr>
+            </p:nvPr>
+        </p:nvSpPr>
+        <p:spPr>
+          <a:xfrm>
+            <a:off x="8910828" y="1508760"/>
+            <a:ext cx="7315" cy="3383280"/>
+          </a:xfrm>
+          <a:prstGeom prst="rect">
+            <a:avLst/>
+          </a:prstGeom>
+          <a:solidFill>
+            <a:srgbClr val="D5D9DF">
+              <a:alpha val="100000"/>
+            </a:srgbClr>
+          </a:solidFill>
+          <a:ln w="3175" cap="rnd" cmpd="sng">
+            <a:solidFill>
+              <a:srgbClr val="D5D9DF">
+                <a:alpha val="100000"/>
+              </a:srgbClr>
+            </a:solidFill>
+            <a:prstDash val="solid"/>
+            <a:round/>
+            <a:headEnd type="none" w="med" len="med"/>
+            <a:tailEnd type="none" w="med" len="med"/>
+          </a:ln>
+        </p:spPr>
+        <p:txBody>
+          <a:bodyPr/>
+          <a:lstStyle/>
+          <a:p>
+            <a:r>
+              <a:rPr/>
+              <a:t/>
+            </a:r>
+          </a:p>
+        </p:txBody>
+      </p:sp>
+      <p:sp>
+        <p:nvSpPr>
+          <p:cNvPr id="23" name=""/>
+          <p:cNvSpPr>
+            <a:spLocks noGrp="1"/>
+          </p:cNvSpPr>
+          <p:nvPr>
+            </p:nvPr>
+        </p:nvSpPr>
+        <p:spPr>
+          <a:xfrm>
+            <a:off x="9139428" y="1737360"/>
+            <a:ext cx="45720" cy="2011680"/>
+          </a:xfrm>
+          <a:prstGeom prst="rect">
+            <a:avLst/>
+          </a:prstGeom>
+          <a:solidFill>
+            <a:srgbClr val="CA5651">
+              <a:alpha val="100000"/>
+            </a:srgbClr>
+          </a:solidFill>
+          <a:ln w="3175" cap="rnd" cmpd="sng">
+            <a:solidFill>
+              <a:srgbClr val="CA5651">
+                <a:alpha val="100000"/>
+              </a:srgbClr>
+            </a:solidFill>
+            <a:prstDash val="solid"/>
+            <a:round/>
+            <a:headEnd type="none" w="med" len="med"/>
+            <a:tailEnd type="none" w="med" len="med"/>
+          </a:ln>
+        </p:spPr>
+        <p:txBody>
+          <a:bodyPr/>
+          <a:lstStyle/>
+          <a:p>
+            <a:r>
+              <a:rPr/>
+              <a:t/>
+            </a:r>
+          </a:p>
+        </p:txBody>
+      </p:sp>
+      <p:sp>
+        <p:nvSpPr>
+          <p:cNvPr id="24" name=""/>
+          <p:cNvSpPr>
+            <a:spLocks noGrp="1"/>
+          </p:cNvSpPr>
+          <p:nvPr>
+            </p:nvPr>
+        </p:nvSpPr>
+        <p:spPr>
+          <a:xfrm>
+            <a:off x="9340596" y="1691640"/>
+            <a:ext cx="2563063" cy="2103120"/>
+          </a:xfrm>
+          <a:prstGeom prst="rect">
+            <a:avLst/>
+          </a:prstGeom>
+        </p:spPr>
+        <p:txBody>
+          <a:bodyPr/>
+          <a:lstStyle/>
+          <a:p>
+            <a:pPr algn="l" marL="0" marR="0">
+              <a:lnSpc>
+                <a:spcPct val="115000"/>
+              </a:lnSpc>
+              <a:spcBef>
+                <a:spcPts val="0"/>
+              </a:spcBef>
+              <a:spcAft>
+                <a:spcPts val="0"/>
+              </a:spcAft>
+              <a:buNone/>
+            </a:pPr>
+            <a:r>
+              <a:rPr cap="none" sz="1300" i="0" b="0" u="none" strike="noStrike">
+                <a:solidFill>
+                  <a:srgbClr val="081F5C">
+                    <a:alpha val="100000"/>
+                  </a:srgbClr>
+                </a:solidFill>
+                <a:latin typeface="Arial"/>
+                <a:ea typeface="Arial"/>
+                <a:cs typeface="Arial"/>
+                <a:sym typeface="Arial"/>
+              </a:rPr>
+              <a:t>Los </a:t>
+            </a:r>
+            <a:r>
+              <a:rPr cap="none" sz="1300" i="0" b="1" u="none" strike="noStrike">
+                <a:solidFill>
+                  <a:srgbClr val="081F5C">
+                    <a:alpha val="100000"/>
+                  </a:srgbClr>
+                </a:solidFill>
+                <a:latin typeface="Arial"/>
+                <a:ea typeface="Arial"/>
+                <a:cs typeface="Arial"/>
+                <a:sym typeface="Arial"/>
+              </a:rPr>
+              <a:t>docentes</a:t>
+            </a:r>
+            <a:r>
+              <a:rPr cap="none" sz="1300" i="0" b="0" u="none" strike="noStrike">
+                <a:solidFill>
+                  <a:srgbClr val="081F5C">
+                    <a:alpha val="100000"/>
+                  </a:srgbClr>
+                </a:solidFill>
+                <a:latin typeface="Arial"/>
+                <a:ea typeface="Arial"/>
+                <a:cs typeface="Arial"/>
+                <a:sym typeface="Arial"/>
+              </a:rPr>
+              <a:t> conocen la misión más que estudiantes y egresados, y la diferencia es clara. Los </a:t>
+            </a:r>
+            <a:r>
+              <a:rPr cap="none" sz="1300" i="0" b="1" u="none" strike="noStrike">
+                <a:solidFill>
+                  <a:srgbClr val="081F5C">
+                    <a:alpha val="100000"/>
+                  </a:srgbClr>
+                </a:solidFill>
+                <a:latin typeface="Arial"/>
+                <a:ea typeface="Arial"/>
+                <a:cs typeface="Arial"/>
+                <a:sym typeface="Arial"/>
+              </a:rPr>
+              <a:t>administrativos</a:t>
+            </a:r>
+            <a:r>
+              <a:rPr cap="none" sz="1300" i="0" b="0" u="none" strike="noStrike">
+                <a:solidFill>
+                  <a:srgbClr val="081F5C">
+                    <a:alpha val="100000"/>
+                  </a:srgbClr>
+                </a:solidFill>
+                <a:latin typeface="Arial"/>
+                <a:ea typeface="Arial"/>
+                <a:cs typeface="Arial"/>
+                <a:sym typeface="Arial"/>
+              </a:rPr>
+              <a:t> también marcan alto, pero con 15 casos no se puede afirmar que se distingan.</a:t>
+            </a:r>
+          </a:p>
+        </p:txBody>
+      </p:sp>
+      <p:sp>
+        <p:nvSpPr>
+          <p:cNvPr id="25" name=""/>
+          <p:cNvSpPr>
+            <a:spLocks noGrp="1"/>
+          </p:cNvSpPr>
+          <p:nvPr>
+            </p:nvPr>
+        </p:nvSpPr>
+        <p:spPr>
+          <a:xfrm>
+            <a:off x="2922270" y="5047488"/>
+            <a:ext cx="137160" cy="137160"/>
+          </a:xfrm>
+          <a:prstGeom prst="rect">
+            <a:avLst/>
+          </a:prstGeom>
+          <a:solidFill>
+            <a:srgbClr val="081F5C">
+              <a:alpha val="100000"/>
+            </a:srgbClr>
+          </a:solidFill>
+          <a:ln w="3175" cap="rnd" cmpd="sng">
+            <a:solidFill>
+              <a:srgbClr val="081F5C">
+                <a:alpha val="100000"/>
+              </a:srgbClr>
+            </a:solidFill>
+            <a:prstDash val="solid"/>
+            <a:round/>
+            <a:headEnd type="none" w="med" len="med"/>
+            <a:tailEnd type="none" w="med" len="med"/>
+          </a:ln>
+        </p:spPr>
+        <p:txBody>
+          <a:bodyPr/>
+          <a:lstStyle/>
+          <a:p>
+            <a:r>
+              <a:rPr/>
+              <a:t/>
+            </a:r>
+          </a:p>
+        </p:txBody>
+      </p:sp>
+      <p:sp>
+        <p:nvSpPr>
+          <p:cNvPr id="26" name=""/>
+          <p:cNvSpPr>
+            <a:spLocks noGrp="1"/>
+          </p:cNvSpPr>
+          <p:nvPr>
+            </p:nvPr>
+        </p:nvSpPr>
+        <p:spPr>
+          <a:xfrm>
+            <a:off x="3031998" y="4983480"/>
+            <a:ext cx="2103120" cy="274320"/>
+          </a:xfrm>
+          <a:prstGeom prst="rect">
+            <a:avLst/>
+          </a:prstGeom>
+        </p:spPr>
+        <p:txBody>
+          <a:bodyPr/>
+          <a:lstStyle/>
+          <a:p>
+            <a:pPr algn="l" marL="0" marR="0">
+              <a:lnSpc>
+                <a:spcPct val="100000"/>
+              </a:lnSpc>
+              <a:spcBef>
+                <a:spcPts val="0"/>
+              </a:spcBef>
+              <a:spcAft>
+                <a:spcPts val="0"/>
+              </a:spcAft>
+              <a:buNone/>
+            </a:pPr>
+            <a:r>
+              <a:rPr cap="none" sz="1200" i="0" b="0" u="none" strike="noStrike">
+                <a:solidFill>
+                  <a:srgbClr val="081F5C">
+                    <a:alpha val="100000"/>
+                  </a:srgbClr>
+                </a:solidFill>
+                <a:latin typeface="Arial"/>
+                <a:ea typeface="Arial"/>
+                <a:cs typeface="Arial"/>
+                <a:sym typeface="Arial"/>
+              </a:rPr>
+              <a:t>Se distingue de los demás</a:t>
+            </a:r>
+          </a:p>
+        </p:txBody>
+      </p:sp>
+      <p:sp>
+        <p:nvSpPr>
+          <p:cNvPr id="27" name=""/>
+          <p:cNvSpPr>
+            <a:spLocks noGrp="1"/>
+          </p:cNvSpPr>
+          <p:nvPr>
+            </p:nvPr>
+        </p:nvSpPr>
+        <p:spPr>
+          <a:xfrm>
+            <a:off x="5226558" y="5047488"/>
+            <a:ext cx="137160" cy="137160"/>
+          </a:xfrm>
+          <a:prstGeom prst="rect">
+            <a:avLst/>
+          </a:prstGeom>
+          <a:solidFill>
+            <a:srgbClr val="8E9DBD">
+              <a:alpha val="100000"/>
+            </a:srgbClr>
+          </a:solidFill>
+          <a:ln w="3175" cap="rnd" cmpd="sng">
+            <a:solidFill>
+              <a:srgbClr val="8E9DBD">
+                <a:alpha val="100000"/>
+              </a:srgbClr>
+            </a:solidFill>
+            <a:prstDash val="solid"/>
+            <a:round/>
+            <a:headEnd type="none" w="med" len="med"/>
+            <a:tailEnd type="none" w="med" len="med"/>
+          </a:ln>
+        </p:spPr>
+        <p:txBody>
+          <a:bodyPr/>
+          <a:lstStyle/>
+          <a:p>
+            <a:r>
+              <a:rPr/>
+              <a:t/>
+            </a:r>
+          </a:p>
+        </p:txBody>
+      </p:sp>
+      <p:sp>
+        <p:nvSpPr>
+          <p:cNvPr id="28" name=""/>
+          <p:cNvSpPr>
+            <a:spLocks noGrp="1"/>
+          </p:cNvSpPr>
+          <p:nvPr>
+            </p:nvPr>
+        </p:nvSpPr>
+        <p:spPr>
+          <a:xfrm>
+            <a:off x="5336286" y="4983480"/>
+            <a:ext cx="1607820" cy="274320"/>
+          </a:xfrm>
+          <a:prstGeom prst="rect">
+            <a:avLst/>
+          </a:prstGeom>
+        </p:spPr>
+        <p:txBody>
+          <a:bodyPr/>
+          <a:lstStyle/>
+          <a:p>
+            <a:pPr algn="l" marL="0" marR="0">
+              <a:lnSpc>
+                <a:spcPct val="100000"/>
+              </a:lnSpc>
+              <a:spcBef>
+                <a:spcPts val="0"/>
+              </a:spcBef>
+              <a:spcAft>
+                <a:spcPts val="0"/>
+              </a:spcAft>
+              <a:buNone/>
+            </a:pPr>
+            <a:r>
+              <a:rPr cap="none" sz="1200" i="0" b="0" u="none" strike="noStrike">
+                <a:solidFill>
+                  <a:srgbClr val="081F5C">
+                    <a:alpha val="100000"/>
+                  </a:srgbClr>
+                </a:solidFill>
+                <a:latin typeface="Arial"/>
+                <a:ea typeface="Arial"/>
+                <a:cs typeface="Arial"/>
+                <a:sym typeface="Arial"/>
+              </a:rPr>
+              <a:t>Sin diferencia clara</a:t>
+            </a:r>
+          </a:p>
+        </p:txBody>
+      </p:sp>
+      <p:sp>
+        <p:nvSpPr>
+          <p:cNvPr id="29" name=""/>
+          <p:cNvSpPr>
+            <a:spLocks noGrp="1"/>
+          </p:cNvSpPr>
+          <p:nvPr>
+            </p:nvPr>
+        </p:nvSpPr>
+        <p:spPr>
+          <a:xfrm>
+            <a:off x="2738628" y="5321808"/>
+            <a:ext cx="4023360" cy="256032"/>
+          </a:xfrm>
+          <a:prstGeom prst="rect">
+            <a:avLst/>
+          </a:prstGeom>
+        </p:spPr>
+        <p:txBody>
+          <a:bodyPr/>
+          <a:lstStyle/>
+          <a:p>
+            <a:pPr algn="l" marL="0" marR="0">
+              <a:lnSpc>
+                <a:spcPct val="100000"/>
+              </a:lnSpc>
+              <a:spcBef>
+                <a:spcPts val="0"/>
+              </a:spcBef>
+              <a:spcAft>
+                <a:spcPts val="0"/>
+              </a:spcAft>
+              <a:buNone/>
+            </a:pPr>
+            <a:r>
+              <a:rPr cap="none" sz="1100" i="1" b="0" u="none" strike="noStrike">
+                <a:solidFill>
+                  <a:srgbClr val="5A6480">
+                    <a:alpha val="100000"/>
+                  </a:srgbClr>
+                </a:solidFill>
+                <a:latin typeface="Arial"/>
+                <a:ea typeface="Arial"/>
+                <a:cs typeface="Arial"/>
+                <a:sym typeface="Arial"/>
+              </a:rPr>
+              <a:t>Barra punteada: base de menos de 30 casos.</a:t>
+            </a:r>
+          </a:p>
+        </p:txBody>
+      </p:sp>
+      <p:sp>
+        <p:nvSpPr>
+          <p:cNvPr id="30" name=""/>
+          <p:cNvSpPr>
+            <a:spLocks noGrp="1"/>
+          </p:cNvSpPr>
+          <p:nvPr>
+            </p:nvPr>
+        </p:nvSpPr>
+        <p:spPr>
+          <a:xfrm>
+            <a:off x="452628" y="6291072"/>
+            <a:ext cx="9601200" cy="365760"/>
+          </a:xfrm>
+          <a:prstGeom prst="rect">
+            <a:avLst/>
+          </a:prstGeom>
+        </p:spPr>
+        <p:txBody>
+          <a:bodyPr/>
+          <a:lstStyle/>
+          <a:p>
+            <a:pPr algn="l" marL="0" marR="0">
+              <a:lnSpc>
+                <a:spcPct val="100000"/>
+              </a:lnSpc>
+              <a:spcBef>
+                <a:spcPts val="0"/>
+              </a:spcBef>
+              <a:spcAft>
+                <a:spcPts val="0"/>
+              </a:spcAft>
+              <a:buNone/>
+            </a:pPr>
+            <a:r>
+              <a:rPr cap="none" sz="1000" i="0" b="1" u="none" strike="noStrike">
+                <a:solidFill>
+                  <a:srgbClr val="081F5C">
+                    <a:alpha val="100000"/>
+                  </a:srgbClr>
+                </a:solidFill>
+                <a:latin typeface="Arial"/>
+                <a:ea typeface="Arial"/>
+                <a:cs typeface="Arial"/>
+                <a:sym typeface="Arial"/>
+              </a:rPr>
+              <a:t>Base: 52 docentes, 172 estudiantes, 178 egresados y 15 administrativos. La versión técnica muestra la matriz de pares con la prueba</a:t>
+            </a:r>
+          </a:p>
+        </p:txBody>
+      </p:sp>
+      <p:sp>
+        <p:nvSpPr>
+          <p:cNvPr id="31" name=""/>
+          <p:cNvSpPr>
+            <a:spLocks noGrp="1"/>
+          </p:cNvSpPr>
+          <p:nvPr>
+            </p:nvPr>
+        </p:nvSpPr>
+        <p:spPr>
+          <a:xfrm>
+            <a:off x="11355019" y="6291072"/>
+            <a:ext cx="548640" cy="274320"/>
+          </a:xfrm>
+          <a:prstGeom prst="rect">
+            <a:avLst/>
+          </a:prstGeom>
+        </p:spPr>
+        <p:txBody>
+          <a:bodyPr/>
+          <a:lstStyle/>
+          <a:p>
+            <a:pPr algn="r" marL="0" marR="0">
+              <a:lnSpc>
+                <a:spcPct val="100000"/>
+              </a:lnSpc>
+              <a:spcBef>
+                <a:spcPts val="0"/>
+              </a:spcBef>
+              <a:spcAft>
+                <a:spcPts val="0"/>
+              </a:spcAft>
+              <a:buNone/>
+            </a:pPr>
+            <a:r>
+              <a:rPr cap="none" sz="1000" i="0" b="0" u="none" strike="noStrike">
+                <a:solidFill>
+                  <a:srgbClr val="5A6480">
+                    <a:alpha val="100000"/>
+                  </a:srgbClr>
+                </a:solidFill>
+                <a:latin typeface="Arial"/>
+                <a:ea typeface="Arial"/>
+                <a:cs typeface="Arial"/>
+                <a:sym typeface="Arial"/>
+              </a:rPr>
+              <a:t>20</a:t>
+            </a:r>
+          </a:p>
+        </p:txBody>
+      </p:sp>
+    </p:spTree>
+  </p:cSld>
+  <p:clrMapOvr>
+    <a:masterClrMapping/>
+  </p:clrMapOvr>
+</p:sld>
+</file>
+
+<file path=ppt/slides/slide21.xml><?xml version="1.0" encoding="utf-8"?>
+<p:sld xmlns:a="http://schemas.openxmlformats.org/drawingml/2006/main" xmlns:r="http://schemas.openxmlformats.org/officeDocument/2006/relationships" xmlns:p="http://schemas.openxmlformats.org/presentationml/2006/main">
+  <p:cSld>
+    <p:spTree>
+      <p:nvGrpSpPr>
+        <p:cNvPr id="1" name=""/>
+        <p:cNvGrpSpPr/>
+        <p:nvPr/>
+      </p:nvGrpSpPr>
+      <p:grpSpPr>
+        <a:xfrm>
+          <a:off x="0" y="0"/>
+          <a:ext cx="0" cy="0"/>
+          <a:chOff x="0" y="0"/>
+          <a:chExt cx="0" cy="0"/>
+        </a:xfrm>
+      </p:grpSpPr>
+      <p:sp>
+        <p:nvSpPr>
+          <p:cNvPr id="2" name=""/>
+          <p:cNvSpPr>
+            <a:spLocks noGrp="1"/>
+          </p:cNvSpPr>
+          <p:nvPr>
+            </p:nvPr>
+        </p:nvSpPr>
+        <p:spPr>
+          <a:xfrm>
+            <a:off x="288036" y="214884"/>
+            <a:ext cx="45720" cy="658368"/>
+          </a:xfrm>
+          <a:prstGeom prst="rect">
+            <a:avLst/>
+          </a:prstGeom>
+          <a:solidFill>
+            <a:srgbClr val="081F5C">
+              <a:alpha val="100000"/>
+            </a:srgbClr>
+          </a:solidFill>
+          <a:ln w="3175" cap="rnd" cmpd="sng">
+            <a:solidFill>
+              <a:srgbClr val="081F5C">
+                <a:alpha val="100000"/>
+              </a:srgbClr>
+            </a:solidFill>
+            <a:prstDash val="solid"/>
+            <a:round/>
+            <a:headEnd type="none" w="med" len="med"/>
+            <a:tailEnd type="none" w="med" len="med"/>
+          </a:ln>
+        </p:spPr>
+        <p:txBody>
+          <a:bodyPr/>
+          <a:lstStyle/>
+          <a:p>
+            <a:r>
+              <a:rPr/>
+              <a:t/>
+            </a:r>
+          </a:p>
+        </p:txBody>
+      </p:sp>
+      <p:sp>
+        <p:nvSpPr>
+          <p:cNvPr id="3" name=""/>
+          <p:cNvSpPr>
+            <a:spLocks noGrp="1"/>
+          </p:cNvSpPr>
+          <p:nvPr>
+            </p:nvPr>
+        </p:nvSpPr>
+        <p:spPr>
+          <a:xfrm>
+            <a:off x="452628" y="169164"/>
+            <a:ext cx="8229600" cy="237744"/>
+          </a:xfrm>
+          <a:prstGeom prst="rect">
+            <a:avLst/>
+          </a:prstGeom>
+        </p:spPr>
+        <p:txBody>
+          <a:bodyPr/>
+          <a:lstStyle/>
+          <a:p>
+            <a:pPr algn="l" marL="0" marR="0">
+              <a:lnSpc>
+                <a:spcPct val="100000"/>
+              </a:lnSpc>
+              <a:spcBef>
+                <a:spcPts val="0"/>
+              </a:spcBef>
+              <a:spcAft>
+                <a:spcPts val="0"/>
+              </a:spcAft>
+              <a:buNone/>
+            </a:pPr>
+            <a:r>
+              <a:rPr cap="none" sz="1000" i="0" b="1" u="none" strike="noStrike">
+                <a:solidFill>
+                  <a:srgbClr val="5A6480">
+                    <a:alpha val="100000"/>
+                  </a:srgbClr>
+                </a:solidFill>
+                <a:latin typeface="Arial"/>
+                <a:ea typeface="Arial"/>
+                <a:cs typeface="Arial"/>
+                <a:sym typeface="Arial"/>
+              </a:rPr>
+              <a:t>PARA EVALUAR</a:t>
+            </a:r>
+          </a:p>
+        </p:txBody>
+      </p:sp>
+      <p:sp>
+        <p:nvSpPr>
+          <p:cNvPr id="4" name="Título"/>
+          <p:cNvSpPr>
+            <a:spLocks noGrp="1"/>
+          </p:cNvSpPr>
+          <p:nvPr>
+            <p:ph type="title"/>
+          </p:nvPr>
+        </p:nvSpPr>
+        <p:spPr>
+          <a:xfrm>
+            <a:off x="452628" y="379476"/>
+            <a:ext cx="9509760" cy="457200"/>
+          </a:xfrm>
+        </p:spPr>
+        <p:txBody>
+          <a:bodyPr anchor="t">
+            <a:noAutofit/>
+          </a:bodyPr>
+          <a:lstStyle/>
+          <a:p>
+            <a:pPr algn="l" marL="0" marR="0">
+              <a:lnSpc>
+                <a:spcPct val="100000"/>
+              </a:lnSpc>
+              <a:spcBef>
+                <a:spcPts val="0"/>
+              </a:spcBef>
+              <a:spcAft>
+                <a:spcPts val="0"/>
+              </a:spcAft>
+              <a:buNone/>
+            </a:pPr>
+            <a:r>
+              <a:rPr cap="none" sz="2400" i="0" b="1" u="none" strike="noStrike">
+                <a:solidFill>
+                  <a:srgbClr val="CA5651">
+                    <a:alpha val="100000"/>
+                  </a:srgbClr>
+                </a:solidFill>
+                <a:latin typeface="Arial"/>
+                <a:ea typeface="Arial"/>
+                <a:cs typeface="Arial"/>
+                <a:sym typeface="Arial"/>
+              </a:rPr>
+              <a:t>Lo que no se trae</a:t>
+            </a:r>
+          </a:p>
+        </p:txBody>
+      </p:sp>
+      <p:sp>
+        <p:nvSpPr>
+          <p:cNvPr id="5" name=""/>
+          <p:cNvSpPr>
+            <a:spLocks noGrp="1"/>
+          </p:cNvSpPr>
+          <p:nvPr>
+            </p:nvPr>
+        </p:nvSpPr>
+        <p:spPr>
+          <a:xfrm>
+            <a:off x="452628" y="1508760"/>
+            <a:ext cx="502920" cy="502920"/>
+          </a:xfrm>
+          <a:prstGeom prst="ellipse">
+            <a:avLst/>
+          </a:prstGeom>
+          <a:solidFill>
+            <a:srgbClr val="081F5C">
+              <a:alpha val="100000"/>
+            </a:srgbClr>
+          </a:solidFill>
+          <a:ln w="3175" cap="rnd" cmpd="sng">
+            <a:solidFill>
+              <a:srgbClr val="081F5C">
+                <a:alpha val="100000"/>
+              </a:srgbClr>
+            </a:solidFill>
+            <a:prstDash val="solid"/>
+            <a:round/>
+            <a:headEnd type="none" w="med" len="med"/>
+            <a:tailEnd type="none" w="med" len="med"/>
+          </a:ln>
+        </p:spPr>
+        <p:txBody>
+          <a:bodyPr/>
+          <a:lstStyle/>
+          <a:p>
+            <a:r>
+              <a:rPr/>
+              <a:t/>
+            </a:r>
+          </a:p>
+        </p:txBody>
+      </p:sp>
+      <p:pic>
+        <p:nvPicPr>
+          <p:cNvPr id="6" name="" descr=""/>
+          <p:cNvPicPr>
+            <a:picLocks noGrp="1"/>
+          </p:cNvPicPr>
+          <p:nvPr>
+            </p:nvPr>
+        </p:nvPicPr>
+        <p:blipFill>
+          <a:blip r:embed="rId2"/>
+          <a:stretch>
+            <a:fillRect/>
+          </a:stretch>
+        </p:blipFill>
+        <p:spPr>
+          <a:xfrm>
+            <a:off x="573329" y="1629461"/>
+            <a:ext cx="261518" cy="261518"/>
+          </a:xfrm>
+          <a:prstGeom prst="rect">
+            <a:avLst/>
+          </a:prstGeom>
+        </p:spPr>
+      </p:pic>
+      <p:sp>
+        <p:nvSpPr>
+          <p:cNvPr id="7" name=""/>
+          <p:cNvSpPr>
+            <a:spLocks noGrp="1"/>
+          </p:cNvSpPr>
+          <p:nvPr>
+            </p:nvPr>
+        </p:nvSpPr>
+        <p:spPr>
+          <a:xfrm>
+            <a:off x="1138428" y="1490472"/>
+            <a:ext cx="10765231" cy="292608"/>
+          </a:xfrm>
+          <a:prstGeom prst="rect">
+            <a:avLst/>
+          </a:prstGeom>
+        </p:spPr>
+        <p:txBody>
+          <a:bodyPr/>
+          <a:lstStyle/>
+          <a:p>
+            <a:pPr algn="l" marL="0" marR="0">
+              <a:lnSpc>
+                <a:spcPct val="100000"/>
+              </a:lnSpc>
+              <a:spcBef>
+                <a:spcPts val="0"/>
+              </a:spcBef>
+              <a:spcAft>
+                <a:spcPts val="0"/>
+              </a:spcAft>
+              <a:buNone/>
+            </a:pPr>
+            <a:r>
+              <a:rPr cap="none" sz="1400" i="0" b="1" u="none" strike="noStrike">
+                <a:solidFill>
+                  <a:srgbClr val="081F5C">
+                    <a:alpha val="100000"/>
+                  </a:srgbClr>
+                </a:solidFill>
+                <a:latin typeface="Arial"/>
+                <a:ea typeface="Arial"/>
+                <a:cs typeface="Arial"/>
+                <a:sym typeface="Arial"/>
+              </a:rPr>
+              <a:t>Fondo oscuro a sangre y cuña diagonal</a:t>
+            </a:r>
+          </a:p>
+        </p:txBody>
+      </p:sp>
+      <p:sp>
+        <p:nvSpPr>
+          <p:cNvPr id="8" name=""/>
+          <p:cNvSpPr>
+            <a:spLocks noGrp="1"/>
+          </p:cNvSpPr>
+          <p:nvPr>
+            </p:nvPr>
+        </p:nvSpPr>
+        <p:spPr>
+          <a:xfrm>
+            <a:off x="1138428" y="1783080"/>
+            <a:ext cx="10765231" cy="457200"/>
+          </a:xfrm>
+          <a:prstGeom prst="rect">
+            <a:avLst/>
+          </a:prstGeom>
+        </p:spPr>
+        <p:txBody>
+          <a:bodyPr/>
+          <a:lstStyle/>
+          <a:p>
+            <a:pPr algn="l" marL="0" marR="0">
+              <a:lnSpc>
+                <a:spcPct val="100000"/>
+              </a:lnSpc>
+              <a:spcBef>
+                <a:spcPts val="0"/>
+              </a:spcBef>
+              <a:spcAft>
+                <a:spcPts val="0"/>
+              </a:spcAft>
+              <a:buNone/>
+            </a:pPr>
+            <a:r>
+              <a:rPr cap="none" sz="1250" i="0" b="0" u="none" strike="noStrike">
+                <a:solidFill>
+                  <a:srgbClr val="5A6480">
+                    <a:alpha val="100000"/>
+                  </a:srgbClr>
+                </a:solidFill>
+                <a:latin typeface="Arial"/>
+                <a:ea typeface="Arial"/>
+                <a:cs typeface="Arial"/>
+                <a:sym typeface="Arial"/>
+              </a:rPr>
+              <a:t>Son la firma visual del informe de referencia. PULSO ya tiene la suya: fondo claro, personas y público.</a:t>
+            </a:r>
+          </a:p>
+        </p:txBody>
+      </p:sp>
+      <p:sp>
+        <p:nvSpPr>
+          <p:cNvPr id="9" name=""/>
+          <p:cNvSpPr>
+            <a:spLocks noGrp="1"/>
+          </p:cNvSpPr>
+          <p:nvPr>
+            </p:nvPr>
+        </p:nvSpPr>
+        <p:spPr>
+          <a:xfrm>
+            <a:off x="452628" y="2331720"/>
+            <a:ext cx="11451031" cy="7315"/>
+          </a:xfrm>
+          <a:prstGeom prst="rect">
+            <a:avLst/>
+          </a:prstGeom>
+          <a:solidFill>
+            <a:srgbClr val="D5D9DF">
+              <a:alpha val="100000"/>
+            </a:srgbClr>
+          </a:solidFill>
+          <a:ln w="3175" cap="rnd" cmpd="sng">
+            <a:solidFill>
+              <a:srgbClr val="D5D9DF">
+                <a:alpha val="100000"/>
+              </a:srgbClr>
+            </a:solidFill>
+            <a:prstDash val="solid"/>
+            <a:round/>
+            <a:headEnd type="none" w="med" len="med"/>
+            <a:tailEnd type="none" w="med" len="med"/>
+          </a:ln>
+        </p:spPr>
+        <p:txBody>
+          <a:bodyPr/>
+          <a:lstStyle/>
+          <a:p>
+            <a:r>
+              <a:rPr/>
+              <a:t/>
+            </a:r>
+          </a:p>
+        </p:txBody>
+      </p:sp>
+      <p:sp>
+        <p:nvSpPr>
+          <p:cNvPr id="10" name=""/>
+          <p:cNvSpPr>
+            <a:spLocks noGrp="1"/>
+          </p:cNvSpPr>
+          <p:nvPr>
+            </p:nvPr>
+        </p:nvSpPr>
+        <p:spPr>
+          <a:xfrm>
+            <a:off x="452628" y="2468880"/>
+            <a:ext cx="502920" cy="502920"/>
+          </a:xfrm>
+          <a:prstGeom prst="ellipse">
+            <a:avLst/>
+          </a:prstGeom>
+          <a:solidFill>
+            <a:srgbClr val="081F5C">
+              <a:alpha val="100000"/>
+            </a:srgbClr>
+          </a:solidFill>
+          <a:ln w="3175" cap="rnd" cmpd="sng">
+            <a:solidFill>
+              <a:srgbClr val="081F5C">
+                <a:alpha val="100000"/>
+              </a:srgbClr>
+            </a:solidFill>
+            <a:prstDash val="solid"/>
+            <a:round/>
+            <a:headEnd type="none" w="med" len="med"/>
+            <a:tailEnd type="none" w="med" len="med"/>
+          </a:ln>
+        </p:spPr>
+        <p:txBody>
+          <a:bodyPr/>
+          <a:lstStyle/>
+          <a:p>
+            <a:r>
+              <a:rPr/>
+              <a:t/>
+            </a:r>
+          </a:p>
+        </p:txBody>
+      </p:sp>
+      <p:pic>
+        <p:nvPicPr>
+          <p:cNvPr id="11" name="" descr=""/>
+          <p:cNvPicPr>
+            <a:picLocks noGrp="1"/>
+          </p:cNvPicPr>
+          <p:nvPr>
+            </p:nvPr>
+        </p:nvPicPr>
+        <p:blipFill>
+          <a:blip r:embed="rId3"/>
+          <a:stretch>
+            <a:fillRect/>
+          </a:stretch>
+        </p:blipFill>
+        <p:spPr>
+          <a:xfrm>
+            <a:off x="573329" y="2589581"/>
+            <a:ext cx="261518" cy="261518"/>
+          </a:xfrm>
+          <a:prstGeom prst="rect">
+            <a:avLst/>
+          </a:prstGeom>
+        </p:spPr>
+      </p:pic>
+      <p:sp>
+        <p:nvSpPr>
+          <p:cNvPr id="12" name=""/>
+          <p:cNvSpPr>
+            <a:spLocks noGrp="1"/>
+          </p:cNvSpPr>
+          <p:nvPr>
+            </p:nvPr>
+        </p:nvSpPr>
+        <p:spPr>
+          <a:xfrm>
+            <a:off x="1138428" y="2450592"/>
+            <a:ext cx="10765231" cy="292608"/>
+          </a:xfrm>
+          <a:prstGeom prst="rect">
+            <a:avLst/>
+          </a:prstGeom>
+        </p:spPr>
+        <p:txBody>
+          <a:bodyPr/>
+          <a:lstStyle/>
+          <a:p>
+            <a:pPr algn="l" marL="0" marR="0">
+              <a:lnSpc>
+                <a:spcPct val="100000"/>
+              </a:lnSpc>
+              <a:spcBef>
+                <a:spcPts val="0"/>
+              </a:spcBef>
+              <a:spcAft>
+                <a:spcPts val="0"/>
+              </a:spcAft>
+              <a:buNone/>
+            </a:pPr>
+            <a:r>
+              <a:rPr cap="none" sz="1400" i="0" b="1" u="none" strike="noStrike">
+                <a:solidFill>
+                  <a:srgbClr val="081F5C">
+                    <a:alpha val="100000"/>
+                  </a:srgbClr>
+                </a:solidFill>
+                <a:latin typeface="Arial"/>
+                <a:ea typeface="Arial"/>
+                <a:cs typeface="Arial"/>
+                <a:sym typeface="Arial"/>
+              </a:rPr>
+              <a:t>Láminas de bloques de texto</a:t>
+            </a:r>
+          </a:p>
+        </p:txBody>
+      </p:sp>
+      <p:sp>
+        <p:nvSpPr>
+          <p:cNvPr id="13" name=""/>
+          <p:cNvSpPr>
+            <a:spLocks noGrp="1"/>
+          </p:cNvSpPr>
+          <p:nvPr>
+            </p:nvPr>
+        </p:nvSpPr>
+        <p:spPr>
+          <a:xfrm>
+            <a:off x="1138428" y="2743200"/>
+            <a:ext cx="10765231" cy="457200"/>
+          </a:xfrm>
+          <a:prstGeom prst="rect">
+            <a:avLst/>
+          </a:prstGeom>
+        </p:spPr>
+        <p:txBody>
+          <a:bodyPr/>
+          <a:lstStyle/>
+          <a:p>
+            <a:pPr algn="l" marL="0" marR="0">
+              <a:lnSpc>
+                <a:spcPct val="100000"/>
+              </a:lnSpc>
+              <a:spcBef>
+                <a:spcPts val="0"/>
+              </a:spcBef>
+              <a:spcAft>
+                <a:spcPts val="0"/>
+              </a:spcAft>
+              <a:buNone/>
+            </a:pPr>
+            <a:r>
+              <a:rPr cap="none" sz="1250" i="0" b="0" u="none" strike="noStrike">
+                <a:solidFill>
+                  <a:srgbClr val="5A6480">
+                    <a:alpha val="100000"/>
+                  </a:srgbClr>
+                </a:solidFill>
+                <a:latin typeface="Arial"/>
+                <a:ea typeface="Arial"/>
+                <a:cs typeface="Arial"/>
+                <a:sym typeface="Arial"/>
+              </a:rPr>
+              <a:t>Limitaciones o recomendaciones en párrafos no salen de los datos. Si hacen falta, van en la ficha técnica o en el Word.</a:t>
+            </a:r>
+          </a:p>
+        </p:txBody>
+      </p:sp>
+      <p:sp>
+        <p:nvSpPr>
+          <p:cNvPr id="14" name=""/>
+          <p:cNvSpPr>
+            <a:spLocks noGrp="1"/>
+          </p:cNvSpPr>
+          <p:nvPr>
+            </p:nvPr>
+        </p:nvSpPr>
+        <p:spPr>
+          <a:xfrm>
+            <a:off x="452628" y="3291840"/>
+            <a:ext cx="11451031" cy="7315"/>
+          </a:xfrm>
+          <a:prstGeom prst="rect">
+            <a:avLst/>
+          </a:prstGeom>
+          <a:solidFill>
+            <a:srgbClr val="D5D9DF">
+              <a:alpha val="100000"/>
+            </a:srgbClr>
+          </a:solidFill>
+          <a:ln w="3175" cap="rnd" cmpd="sng">
+            <a:solidFill>
+              <a:srgbClr val="D5D9DF">
+                <a:alpha val="100000"/>
+              </a:srgbClr>
+            </a:solidFill>
+            <a:prstDash val="solid"/>
+            <a:round/>
+            <a:headEnd type="none" w="med" len="med"/>
+            <a:tailEnd type="none" w="med" len="med"/>
+          </a:ln>
+        </p:spPr>
+        <p:txBody>
+          <a:bodyPr/>
+          <a:lstStyle/>
+          <a:p>
+            <a:r>
+              <a:rPr/>
+              <a:t/>
+            </a:r>
+          </a:p>
+        </p:txBody>
+      </p:sp>
+      <p:sp>
+        <p:nvSpPr>
+          <p:cNvPr id="15" name=""/>
+          <p:cNvSpPr>
+            <a:spLocks noGrp="1"/>
+          </p:cNvSpPr>
+          <p:nvPr>
+            </p:nvPr>
+        </p:nvSpPr>
+        <p:spPr>
+          <a:xfrm>
+            <a:off x="452628" y="3429000"/>
+            <a:ext cx="502920" cy="502920"/>
+          </a:xfrm>
+          <a:prstGeom prst="ellipse">
+            <a:avLst/>
+          </a:prstGeom>
+          <a:solidFill>
+            <a:srgbClr val="081F5C">
+              <a:alpha val="100000"/>
+            </a:srgbClr>
+          </a:solidFill>
+          <a:ln w="3175" cap="rnd" cmpd="sng">
+            <a:solidFill>
+              <a:srgbClr val="081F5C">
+                <a:alpha val="100000"/>
+              </a:srgbClr>
+            </a:solidFill>
+            <a:prstDash val="solid"/>
+            <a:round/>
+            <a:headEnd type="none" w="med" len="med"/>
+            <a:tailEnd type="none" w="med" len="med"/>
+          </a:ln>
+        </p:spPr>
+        <p:txBody>
+          <a:bodyPr/>
+          <a:lstStyle/>
+          <a:p>
+            <a:r>
+              <a:rPr/>
+              <a:t/>
+            </a:r>
+          </a:p>
+        </p:txBody>
+      </p:sp>
+      <p:pic>
+        <p:nvPicPr>
+          <p:cNvPr id="16" name="" descr=""/>
+          <p:cNvPicPr>
+            <a:picLocks noGrp="1"/>
+          </p:cNvPicPr>
+          <p:nvPr>
+            </p:nvPr>
+        </p:nvPicPr>
+        <p:blipFill>
+          <a:blip r:embed="rId4"/>
+          <a:stretch>
+            <a:fillRect/>
+          </a:stretch>
+        </p:blipFill>
+        <p:spPr>
+          <a:xfrm>
+            <a:off x="573329" y="3549701"/>
+            <a:ext cx="261518" cy="261518"/>
+          </a:xfrm>
+          <a:prstGeom prst="rect">
+            <a:avLst/>
+          </a:prstGeom>
+        </p:spPr>
+      </p:pic>
+      <p:sp>
+        <p:nvSpPr>
+          <p:cNvPr id="17" name=""/>
+          <p:cNvSpPr>
+            <a:spLocks noGrp="1"/>
+          </p:cNvSpPr>
+          <p:nvPr>
+            </p:nvPr>
+        </p:nvSpPr>
+        <p:spPr>
+          <a:xfrm>
+            <a:off x="1138428" y="3410712"/>
+            <a:ext cx="10765231" cy="292608"/>
+          </a:xfrm>
+          <a:prstGeom prst="rect">
+            <a:avLst/>
+          </a:prstGeom>
+        </p:spPr>
+        <p:txBody>
+          <a:bodyPr/>
+          <a:lstStyle/>
+          <a:p>
+            <a:pPr algn="l" marL="0" marR="0">
+              <a:lnSpc>
+                <a:spcPct val="100000"/>
+              </a:lnSpc>
+              <a:spcBef>
+                <a:spcPts val="0"/>
+              </a:spcBef>
+              <a:spcAft>
+                <a:spcPts val="0"/>
+              </a:spcAft>
+              <a:buNone/>
+            </a:pPr>
+            <a:r>
+              <a:rPr cap="none" sz="1400" i="0" b="1" u="none" strike="noStrike">
+                <a:solidFill>
+                  <a:srgbClr val="081F5C">
+                    <a:alpha val="100000"/>
+                  </a:srgbClr>
+                </a:solidFill>
+                <a:latin typeface="Arial"/>
+                <a:ea typeface="Arial"/>
+                <a:cs typeface="Arial"/>
+                <a:sym typeface="Arial"/>
+              </a:rPr>
+              <a:t>Diagrama de flecha de los factores</a:t>
+            </a:r>
+          </a:p>
+        </p:txBody>
+      </p:sp>
+      <p:sp>
+        <p:nvSpPr>
+          <p:cNvPr id="18" name=""/>
+          <p:cNvSpPr>
+            <a:spLocks noGrp="1"/>
+          </p:cNvSpPr>
+          <p:nvPr>
+            </p:nvPr>
+        </p:nvSpPr>
+        <p:spPr>
+          <a:xfrm>
+            <a:off x="1138428" y="3703320"/>
+            <a:ext cx="10765231" cy="457200"/>
+          </a:xfrm>
+          <a:prstGeom prst="rect">
+            <a:avLst/>
+          </a:prstGeom>
+        </p:spPr>
+        <p:txBody>
+          <a:bodyPr/>
+          <a:lstStyle/>
+          <a:p>
+            <a:pPr algn="l" marL="0" marR="0">
+              <a:lnSpc>
+                <a:spcPct val="100000"/>
+              </a:lnSpc>
+              <a:spcBef>
+                <a:spcPts val="0"/>
+              </a:spcBef>
+              <a:spcAft>
+                <a:spcPts val="0"/>
+              </a:spcAft>
+              <a:buNone/>
+            </a:pPr>
+            <a:r>
+              <a:rPr cap="none" sz="1250" i="0" b="0" u="none" strike="noStrike">
+                <a:solidFill>
+                  <a:srgbClr val="5A6480">
+                    <a:alpha val="100000"/>
+                  </a:srgbClr>
+                </a:solidFill>
+                <a:latin typeface="Arial"/>
+                <a:ea typeface="Arial"/>
+                <a:cs typeface="Arial"/>
+                <a:sym typeface="Arial"/>
+              </a:rPr>
+              <a:t>Es decorativo. El peso de cada aspecto se lee mejor con puntos, como en la propuesta 4.</a:t>
+            </a:r>
+          </a:p>
+        </p:txBody>
+      </p:sp>
+      <p:sp>
+        <p:nvSpPr>
+          <p:cNvPr id="19" name=""/>
+          <p:cNvSpPr>
+            <a:spLocks noGrp="1"/>
+          </p:cNvSpPr>
+          <p:nvPr>
+            </p:nvPr>
+        </p:nvSpPr>
+        <p:spPr>
+          <a:xfrm>
+            <a:off x="452628" y="4251960"/>
+            <a:ext cx="11451031" cy="7315"/>
+          </a:xfrm>
+          <a:prstGeom prst="rect">
+            <a:avLst/>
+          </a:prstGeom>
+          <a:solidFill>
+            <a:srgbClr val="D5D9DF">
+              <a:alpha val="100000"/>
+            </a:srgbClr>
+          </a:solidFill>
+          <a:ln w="3175" cap="rnd" cmpd="sng">
+            <a:solidFill>
+              <a:srgbClr val="D5D9DF">
+                <a:alpha val="100000"/>
+              </a:srgbClr>
+            </a:solidFill>
+            <a:prstDash val="solid"/>
+            <a:round/>
+            <a:headEnd type="none" w="med" len="med"/>
+            <a:tailEnd type="none" w="med" len="med"/>
+          </a:ln>
+        </p:spPr>
+        <p:txBody>
+          <a:bodyPr/>
+          <a:lstStyle/>
+          <a:p>
+            <a:r>
+              <a:rPr/>
+              <a:t/>
+            </a:r>
+          </a:p>
+        </p:txBody>
+      </p:sp>
+      <p:sp>
+        <p:nvSpPr>
+          <p:cNvPr id="20" name=""/>
+          <p:cNvSpPr>
+            <a:spLocks noGrp="1"/>
+          </p:cNvSpPr>
+          <p:nvPr>
+            </p:nvPr>
+        </p:nvSpPr>
+        <p:spPr>
+          <a:xfrm>
+            <a:off x="452628" y="4389120"/>
+            <a:ext cx="502920" cy="502920"/>
+          </a:xfrm>
+          <a:prstGeom prst="ellipse">
+            <a:avLst/>
+          </a:prstGeom>
+          <a:solidFill>
+            <a:srgbClr val="081F5C">
+              <a:alpha val="100000"/>
+            </a:srgbClr>
+          </a:solidFill>
+          <a:ln w="3175" cap="rnd" cmpd="sng">
+            <a:solidFill>
+              <a:srgbClr val="081F5C">
+                <a:alpha val="100000"/>
+              </a:srgbClr>
+            </a:solidFill>
+            <a:prstDash val="solid"/>
+            <a:round/>
+            <a:headEnd type="none" w="med" len="med"/>
+            <a:tailEnd type="none" w="med" len="med"/>
+          </a:ln>
+        </p:spPr>
+        <p:txBody>
+          <a:bodyPr/>
+          <a:lstStyle/>
+          <a:p>
+            <a:r>
+              <a:rPr/>
+              <a:t/>
+            </a:r>
+          </a:p>
+        </p:txBody>
+      </p:sp>
+      <p:pic>
+        <p:nvPicPr>
+          <p:cNvPr id="21" name="" descr=""/>
+          <p:cNvPicPr>
+            <a:picLocks noGrp="1"/>
+          </p:cNvPicPr>
+          <p:nvPr>
+            </p:nvPr>
+        </p:nvPicPr>
+        <p:blipFill>
+          <a:blip r:embed="rId5"/>
+          <a:stretch>
+            <a:fillRect/>
+          </a:stretch>
+        </p:blipFill>
+        <p:spPr>
+          <a:xfrm>
+            <a:off x="573329" y="4509821"/>
+            <a:ext cx="261518" cy="261518"/>
+          </a:xfrm>
+          <a:prstGeom prst="rect">
+            <a:avLst/>
+          </a:prstGeom>
+        </p:spPr>
+      </p:pic>
+      <p:sp>
+        <p:nvSpPr>
+          <p:cNvPr id="22" name=""/>
+          <p:cNvSpPr>
+            <a:spLocks noGrp="1"/>
+          </p:cNvSpPr>
+          <p:nvPr>
+            </p:nvPr>
+        </p:nvSpPr>
+        <p:spPr>
+          <a:xfrm>
+            <a:off x="1138428" y="4370832"/>
+            <a:ext cx="10765231" cy="292608"/>
+          </a:xfrm>
+          <a:prstGeom prst="rect">
+            <a:avLst/>
+          </a:prstGeom>
+        </p:spPr>
+        <p:txBody>
+          <a:bodyPr/>
+          <a:lstStyle/>
+          <a:p>
+            <a:pPr algn="l" marL="0" marR="0">
+              <a:lnSpc>
+                <a:spcPct val="100000"/>
+              </a:lnSpc>
+              <a:spcBef>
+                <a:spcPts val="0"/>
+              </a:spcBef>
+              <a:spcAft>
+                <a:spcPts val="0"/>
+              </a:spcAft>
+              <a:buNone/>
+            </a:pPr>
+            <a:r>
+              <a:rPr cap="none" sz="1400" i="0" b="1" u="none" strike="noStrike">
+                <a:solidFill>
+                  <a:srgbClr val="081F5C">
+                    <a:alpha val="100000"/>
+                  </a:srgbClr>
+                </a:solidFill>
+                <a:latin typeface="Arial"/>
+                <a:ea typeface="Arial"/>
+                <a:cs typeface="Arial"/>
+                <a:sym typeface="Arial"/>
+              </a:rPr>
+              <a:t>Colores por factor y celdas de color</a:t>
+            </a:r>
+          </a:p>
+        </p:txBody>
+      </p:sp>
+      <p:sp>
+        <p:nvSpPr>
+          <p:cNvPr id="23" name=""/>
+          <p:cNvSpPr>
+            <a:spLocks noGrp="1"/>
+          </p:cNvSpPr>
+          <p:nvPr>
+            </p:nvPr>
+        </p:nvSpPr>
+        <p:spPr>
+          <a:xfrm>
+            <a:off x="1138428" y="4663440"/>
+            <a:ext cx="10765231" cy="457200"/>
+          </a:xfrm>
+          <a:prstGeom prst="rect">
+            <a:avLst/>
+          </a:prstGeom>
+        </p:spPr>
+        <p:txBody>
+          <a:bodyPr/>
+          <a:lstStyle/>
+          <a:p>
+            <a:pPr algn="l" marL="0" marR="0">
+              <a:lnSpc>
+                <a:spcPct val="100000"/>
+              </a:lnSpc>
+              <a:spcBef>
+                <a:spcPts val="0"/>
+              </a:spcBef>
+              <a:spcAft>
+                <a:spcPts val="0"/>
+              </a:spcAft>
+              <a:buNone/>
+            </a:pPr>
+            <a:r>
+              <a:rPr cap="none" sz="1250" i="0" b="0" u="none" strike="noStrike">
+                <a:solidFill>
+                  <a:srgbClr val="5A6480">
+                    <a:alpha val="100000"/>
+                  </a:srgbClr>
+                </a:solidFill>
+                <a:latin typeface="Arial"/>
+                <a:ea typeface="Arial"/>
+                <a:cs typeface="Arial"/>
+                <a:sym typeface="Arial"/>
+              </a:rPr>
+              <a:t>Rompen la paleta: en PULSO el color dice la respuesta, no el tema.</a:t>
+            </a:r>
+          </a:p>
+        </p:txBody>
+      </p:sp>
+      <p:sp>
+        <p:nvSpPr>
+          <p:cNvPr id="24" name=""/>
+          <p:cNvSpPr>
+            <a:spLocks noGrp="1"/>
+          </p:cNvSpPr>
+          <p:nvPr>
+            </p:nvPr>
+        </p:nvSpPr>
+        <p:spPr>
+          <a:xfrm>
+            <a:off x="11355019" y="6291072"/>
+            <a:ext cx="548640" cy="274320"/>
+          </a:xfrm>
+          <a:prstGeom prst="rect">
+            <a:avLst/>
+          </a:prstGeom>
+        </p:spPr>
+        <p:txBody>
+          <a:bodyPr/>
+          <a:lstStyle/>
+          <a:p>
+            <a:pPr algn="r" marL="0" marR="0">
+              <a:lnSpc>
+                <a:spcPct val="100000"/>
+              </a:lnSpc>
+              <a:spcBef>
+                <a:spcPts val="0"/>
+              </a:spcBef>
+              <a:spcAft>
+                <a:spcPts val="0"/>
+              </a:spcAft>
+              <a:buNone/>
+            </a:pPr>
+            <a:r>
+              <a:rPr cap="none" sz="1000" i="0" b="0" u="none" strike="noStrike">
+                <a:solidFill>
+                  <a:srgbClr val="5A6480">
+                    <a:alpha val="100000"/>
+                  </a:srgbClr>
+                </a:solidFill>
+                <a:latin typeface="Arial"/>
+                <a:ea typeface="Arial"/>
+                <a:cs typeface="Arial"/>
+                <a:sym typeface="Arial"/>
+              </a:rPr>
+              <a:t>21</a:t>
+            </a:r>
+          </a:p>
+        </p:txBody>
+      </p:sp>
+    </p:spTree>
+  </p:cSld>
+  <p:clrMapOvr>
+    <a:masterClrMapping/>
+  </p:clrMapOvr>
+</p:sld>
+</file>
+
 <file path=ppt/slides/slide3.xml><?xml version="1.0" encoding="utf-8"?>
 <p:sld xmlns:a="http://schemas.openxmlformats.org/drawingml/2006/main" xmlns:r="http://schemas.openxmlformats.org/officeDocument/2006/relationships" xmlns:p="http://schemas.openxmlformats.org/presentationml/2006/main">
   <p:cSld>
